--- a/exports/pptx/lessons/primary-module-11-multiplication-near-base/day-05-pairs-race.pptx
+++ b/exports/pptx/lessons/primary-module-11-multiplication-near-base/day-05-pairs-race.pptx
@@ -16,9 +16,12 @@
     <p:sldId id="264" r:id="rId10"/>
     <p:sldId id="265" r:id="rId11"/>
     <p:sldId id="266" r:id="rId12"/>
+    <p:sldId id="267" r:id="rId13"/>
+    <p:sldId id="268" r:id="rId14"/>
+    <p:sldId id="269" r:id="rId15"/>
   </p:sldIdLst>
   <p:notesMasterIdLst>
-    <p:notesMasterId r:id="rId13"/>
+    <p:notesMasterId r:id="rId16"/>
   </p:notesMasterIdLst>
   <p:sldSz cx="9144000" cy="5143500"/>
   <p:notesSz cx="5143500" cy="9144000"/>
@@ -712,6 +715,270 @@
             <a:fld id="{F7021451-1387-4CA6-816F-3879F97B5CBC}" type="slidenum">
               <a:rPr lang="en-US"/>
               <a:t>11</a:t>
+            </a:fld>
+            <a:endParaRPr lang="en-US"/>
+          </a:p>
+        </p:txBody>
+      </p:sp>
+    </p:spTree>
+    <p:extLst>
+      <p:ext uri="{BB962C8B-B14F-4D97-AF65-F5344CB8AC3E}">
+        <p14:creationId xmlns:p14="http://schemas.microsoft.com/office/powerpoint/2010/main" val="1024086991"/>
+      </p:ext>
+    </p:extLst>
+  </p:cSld>
+  <p:clrMapOvr>
+    <a:masterClrMapping/>
+  </p:clrMapOvr>
+</p:notes>
+</file>
+
+<file path=ppt/notesSlides/notesSlide12.xml><?xml version="1.0" encoding="utf-8"?>
+<p:notes xmlns:a="http://schemas.openxmlformats.org/drawingml/2006/main" xmlns:r="http://schemas.openxmlformats.org/officeDocument/2006/relationships" xmlns:p="http://schemas.openxmlformats.org/presentationml/2006/main">
+  <p:cSld>
+    <p:spTree>
+      <p:nvGrpSpPr>
+        <p:cNvPr id="1" name=""/>
+        <p:cNvGrpSpPr/>
+        <p:nvPr/>
+      </p:nvGrpSpPr>
+      <p:grpSpPr>
+        <a:xfrm>
+          <a:off x="0" y="0"/>
+          <a:ext cx="0" cy="0"/>
+          <a:chOff x="0" y="0"/>
+          <a:chExt cx="0" cy="0"/>
+        </a:xfrm>
+      </p:grpSpPr>
+      <p:sp>
+        <p:nvSpPr>
+          <p:cNvPr id="2" name="Slide Image Placeholder 1"/>
+          <p:cNvSpPr>
+            <a:spLocks noGrp="1" noRot="1" noChangeAspect="1"/>
+          </p:cNvSpPr>
+          <p:nvPr>
+            <p:ph type="sldImg"/>
+          </p:nvPr>
+        </p:nvSpPr>
+        <p:spPr/>
+      </p:sp>
+      <p:sp>
+        <p:nvSpPr>
+          <p:cNvPr id="3" name="Notes Placeholder 2"/>
+          <p:cNvSpPr>
+            <a:spLocks noGrp="1"/>
+          </p:cNvSpPr>
+          <p:nvPr>
+            <p:ph type="body" idx="1"/>
+          </p:nvPr>
+        </p:nvSpPr>
+        <p:spPr/>
+        <p:txBody>
+          <a:bodyPr/>
+          <a:lstStyle/>
+          <a:p>
+            <a:r>
+              <a:rPr lang="en-US" dirty="0"/>
+              <a:t/>
+            </a:r>
+            <a:endParaRPr lang="en-US" dirty="0"/>
+          </a:p>
+        </p:txBody>
+      </p:sp>
+      <p:sp>
+        <p:nvSpPr>
+          <p:cNvPr id="4" name="Slide Number Placeholder 3"/>
+          <p:cNvSpPr>
+            <a:spLocks noGrp="1"/>
+          </p:cNvSpPr>
+          <p:nvPr>
+            <p:ph type="sldNum" sz="quarter" idx="10"/>
+          </p:nvPr>
+        </p:nvSpPr>
+        <p:spPr/>
+        <p:txBody>
+          <a:bodyPr/>
+          <a:lstStyle/>
+          <a:p>
+            <a:fld id="{F7021451-1387-4CA6-816F-3879F97B5CBC}" type="slidenum">
+              <a:rPr lang="en-US"/>
+              <a:t>12</a:t>
+            </a:fld>
+            <a:endParaRPr lang="en-US"/>
+          </a:p>
+        </p:txBody>
+      </p:sp>
+    </p:spTree>
+    <p:extLst>
+      <p:ext uri="{BB962C8B-B14F-4D97-AF65-F5344CB8AC3E}">
+        <p14:creationId xmlns:p14="http://schemas.microsoft.com/office/powerpoint/2010/main" val="1024086991"/>
+      </p:ext>
+    </p:extLst>
+  </p:cSld>
+  <p:clrMapOvr>
+    <a:masterClrMapping/>
+  </p:clrMapOvr>
+</p:notes>
+</file>
+
+<file path=ppt/notesSlides/notesSlide13.xml><?xml version="1.0" encoding="utf-8"?>
+<p:notes xmlns:a="http://schemas.openxmlformats.org/drawingml/2006/main" xmlns:r="http://schemas.openxmlformats.org/officeDocument/2006/relationships" xmlns:p="http://schemas.openxmlformats.org/presentationml/2006/main">
+  <p:cSld>
+    <p:spTree>
+      <p:nvGrpSpPr>
+        <p:cNvPr id="1" name=""/>
+        <p:cNvGrpSpPr/>
+        <p:nvPr/>
+      </p:nvGrpSpPr>
+      <p:grpSpPr>
+        <a:xfrm>
+          <a:off x="0" y="0"/>
+          <a:ext cx="0" cy="0"/>
+          <a:chOff x="0" y="0"/>
+          <a:chExt cx="0" cy="0"/>
+        </a:xfrm>
+      </p:grpSpPr>
+      <p:sp>
+        <p:nvSpPr>
+          <p:cNvPr id="2" name="Slide Image Placeholder 1"/>
+          <p:cNvSpPr>
+            <a:spLocks noGrp="1" noRot="1" noChangeAspect="1"/>
+          </p:cNvSpPr>
+          <p:nvPr>
+            <p:ph type="sldImg"/>
+          </p:nvPr>
+        </p:nvSpPr>
+        <p:spPr/>
+      </p:sp>
+      <p:sp>
+        <p:nvSpPr>
+          <p:cNvPr id="3" name="Notes Placeholder 2"/>
+          <p:cNvSpPr>
+            <a:spLocks noGrp="1"/>
+          </p:cNvSpPr>
+          <p:nvPr>
+            <p:ph type="body" idx="1"/>
+          </p:nvPr>
+        </p:nvSpPr>
+        <p:spPr/>
+        <p:txBody>
+          <a:bodyPr/>
+          <a:lstStyle/>
+          <a:p>
+            <a:r>
+              <a:rPr lang="en-US" dirty="0"/>
+              <a:t/>
+            </a:r>
+            <a:endParaRPr lang="en-US" dirty="0"/>
+          </a:p>
+        </p:txBody>
+      </p:sp>
+      <p:sp>
+        <p:nvSpPr>
+          <p:cNvPr id="4" name="Slide Number Placeholder 3"/>
+          <p:cNvSpPr>
+            <a:spLocks noGrp="1"/>
+          </p:cNvSpPr>
+          <p:nvPr>
+            <p:ph type="sldNum" sz="quarter" idx="10"/>
+          </p:nvPr>
+        </p:nvSpPr>
+        <p:spPr/>
+        <p:txBody>
+          <a:bodyPr/>
+          <a:lstStyle/>
+          <a:p>
+            <a:fld id="{F7021451-1387-4CA6-816F-3879F97B5CBC}" type="slidenum">
+              <a:rPr lang="en-US"/>
+              <a:t>13</a:t>
+            </a:fld>
+            <a:endParaRPr lang="en-US"/>
+          </a:p>
+        </p:txBody>
+      </p:sp>
+    </p:spTree>
+    <p:extLst>
+      <p:ext uri="{BB962C8B-B14F-4D97-AF65-F5344CB8AC3E}">
+        <p14:creationId xmlns:p14="http://schemas.microsoft.com/office/powerpoint/2010/main" val="1024086991"/>
+      </p:ext>
+    </p:extLst>
+  </p:cSld>
+  <p:clrMapOvr>
+    <a:masterClrMapping/>
+  </p:clrMapOvr>
+</p:notes>
+</file>
+
+<file path=ppt/notesSlides/notesSlide14.xml><?xml version="1.0" encoding="utf-8"?>
+<p:notes xmlns:a="http://schemas.openxmlformats.org/drawingml/2006/main" xmlns:r="http://schemas.openxmlformats.org/officeDocument/2006/relationships" xmlns:p="http://schemas.openxmlformats.org/presentationml/2006/main">
+  <p:cSld>
+    <p:spTree>
+      <p:nvGrpSpPr>
+        <p:cNvPr id="1" name=""/>
+        <p:cNvGrpSpPr/>
+        <p:nvPr/>
+      </p:nvGrpSpPr>
+      <p:grpSpPr>
+        <a:xfrm>
+          <a:off x="0" y="0"/>
+          <a:ext cx="0" cy="0"/>
+          <a:chOff x="0" y="0"/>
+          <a:chExt cx="0" cy="0"/>
+        </a:xfrm>
+      </p:grpSpPr>
+      <p:sp>
+        <p:nvSpPr>
+          <p:cNvPr id="2" name="Slide Image Placeholder 1"/>
+          <p:cNvSpPr>
+            <a:spLocks noGrp="1" noRot="1" noChangeAspect="1"/>
+          </p:cNvSpPr>
+          <p:nvPr>
+            <p:ph type="sldImg"/>
+          </p:nvPr>
+        </p:nvSpPr>
+        <p:spPr/>
+      </p:sp>
+      <p:sp>
+        <p:nvSpPr>
+          <p:cNvPr id="3" name="Notes Placeholder 2"/>
+          <p:cNvSpPr>
+            <a:spLocks noGrp="1"/>
+          </p:cNvSpPr>
+          <p:nvPr>
+            <p:ph type="body" idx="1"/>
+          </p:nvPr>
+        </p:nvSpPr>
+        <p:spPr/>
+        <p:txBody>
+          <a:bodyPr/>
+          <a:lstStyle/>
+          <a:p>
+            <a:r>
+              <a:rPr lang="en-US" dirty="0"/>
+              <a:t/>
+            </a:r>
+            <a:endParaRPr lang="en-US" dirty="0"/>
+          </a:p>
+        </p:txBody>
+      </p:sp>
+      <p:sp>
+        <p:nvSpPr>
+          <p:cNvPr id="4" name="Slide Number Placeholder 3"/>
+          <p:cNvSpPr>
+            <a:spLocks noGrp="1"/>
+          </p:cNvSpPr>
+          <p:nvPr>
+            <p:ph type="sldNum" sz="quarter" idx="10"/>
+          </p:nvPr>
+        </p:nvSpPr>
+        <p:spPr/>
+        <p:txBody>
+          <a:bodyPr/>
+          <a:lstStyle/>
+          <a:p>
+            <a:fld id="{F7021451-1387-4CA6-816F-3879F97B5CBC}" type="slidenum">
+              <a:rPr lang="en-US"/>
+              <a:t>14</a:t>
             </a:fld>
             <a:endParaRPr lang="en-US"/>
           </a:p>
@@ -1965,102 +2232,6 @@
         </p:nvSpPr>
         <p:spPr>
           <a:xfrm>
-            <a:off x="406301" y="1223963"/>
-            <a:ext cx="8498026" cy="274290"/>
-          </a:xfrm>
-          <a:prstGeom prst="rect">
-            <a:avLst/>
-          </a:prstGeom>
-          <a:noFill/>
-          <a:ln/>
-        </p:spPr>
-        <p:txBody>
-          <a:bodyPr wrap="square" lIns="0" tIns="0" rIns="0" bIns="0" rtlCol="0" anchor="t"/>
-          <a:lstStyle/>
-          <a:p>
-            <a:pPr algn="l" indent="0" marL="0">
-              <a:lnSpc>
-                <a:spcPts val="2160"/>
-              </a:lnSpc>
-              <a:spcBef>
-                <a:spcPts val="600"/>
-              </a:spcBef>
-              <a:spcAft>
-                <a:spcPts val="800"/>
-              </a:spcAft>
-              <a:buNone/>
-            </a:pPr>
-            <a:r>
-              <a:rPr lang="en-US" sz="1800" b="1" dirty="0">
-                <a:solidFill>
-                  <a:srgbClr val="E07A5F"/>
-                </a:solidFill>
-                <a:latin typeface="Georgia" pitchFamily="34" charset="0"/>
-                <a:ea typeface="Georgia" pitchFamily="34" charset="-122"/>
-                <a:cs typeface="Georgia" pitchFamily="34" charset="-120"/>
-              </a:rPr>
-              <a:t>Goal</a:t>
-            </a:r>
-            <a:endParaRPr lang="en-US" sz="1800" dirty="0"/>
-          </a:p>
-        </p:txBody>
-      </p:sp>
-      <p:sp>
-        <p:nvSpPr>
-          <p:cNvPr id="6" name="Text 4"/>
-          <p:cNvSpPr/>
-          <p:nvPr/>
-        </p:nvSpPr>
-        <p:spPr>
-          <a:xfrm>
-            <a:off x="406301" y="1637854"/>
-            <a:ext cx="8498026" cy="213271"/>
-          </a:xfrm>
-          <a:prstGeom prst="rect">
-            <a:avLst/>
-          </a:prstGeom>
-          <a:noFill/>
-          <a:ln/>
-        </p:spPr>
-        <p:txBody>
-          <a:bodyPr wrap="square" lIns="0" tIns="0" rIns="0" bIns="0" rtlCol="0" anchor="t"/>
-          <a:lstStyle/>
-          <a:p>
-            <a:pPr algn="l" indent="0" marL="0">
-              <a:lnSpc>
-                <a:spcPts val="1680"/>
-              </a:lnSpc>
-              <a:spcBef>
-                <a:spcPts val="300"/>
-              </a:spcBef>
-              <a:spcAft>
-                <a:spcPts val="300"/>
-              </a:spcAft>
-              <a:buNone/>
-            </a:pPr>
-            <a:r>
-              <a:rPr lang="en-US" sz="1200" dirty="0">
-                <a:solidFill>
-                  <a:srgbClr val="2C2C2C"/>
-                </a:solidFill>
-                <a:latin typeface="Verdana" pitchFamily="34" charset="0"/>
-                <a:ea typeface="Verdana" pitchFamily="34" charset="-122"/>
-                <a:cs typeface="Verdana" pitchFamily="34" charset="-120"/>
-              </a:rPr>
-              <a:t>Children speed up the finger trick to under 5 seconds per problem.</a:t>
-            </a:r>
-            <a:endParaRPr lang="en-US" sz="1200" dirty="0"/>
-          </a:p>
-        </p:txBody>
-      </p:sp>
-      <p:sp>
-        <p:nvSpPr>
-          <p:cNvPr id="7" name="Text 5"/>
-          <p:cNvSpPr/>
-          <p:nvPr/>
-        </p:nvSpPr>
-        <p:spPr>
-          <a:xfrm>
             <a:off x="406301" y="4434929"/>
             <a:ext cx="8498026" cy="213271"/>
           </a:xfrm>
@@ -2205,7 +2376,7 @@
                 <a:ea typeface="Georgia" pitchFamily="34" charset="-122"/>
                 <a:cs typeface="Georgia" pitchFamily="34" charset="-120"/>
               </a:rPr>
-              <a:t>Differentiation</a:t>
+              <a:t>Pair quick-fire (8 min)</a:t>
             </a:r>
             <a:endParaRPr lang="en-US" sz="1800" dirty="0"/>
           </a:p>
@@ -2220,7 +2391,7 @@
         <p:spPr>
           <a:xfrm>
             <a:off x="634901" y="883593"/>
-            <a:ext cx="8102798" cy="759916"/>
+            <a:ext cx="8102798" cy="769441"/>
           </a:xfrm>
           <a:prstGeom prst="rect">
             <a:avLst/>
@@ -2243,7 +2414,7 @@
               <a:buChar char="•"/>
             </a:pPr>
             <a:r>
-              <a:rPr lang="en-US" sz="1200" b="1" dirty="0">
+              <a:rPr lang="en-US" sz="1200" dirty="0">
                 <a:solidFill>
                   <a:srgbClr val="2C2C2C"/>
                 </a:solidFill>
@@ -2251,16 +2422,20 @@
                 <a:ea typeface="Verdana" pitchFamily="34" charset="-122"/>
                 <a:cs typeface="Verdana" pitchFamily="34" charset="-120"/>
               </a:rPr>
-              <a:t>Tier up:</a:t>
-            </a:r>
-            <a:pPr algn="l" indent="0" marL="0">
+              <a:t>Pair up.</a:t>
+            </a:r>
+            <a:endParaRPr lang="en-US" sz="1200" dirty="0"/>
+          </a:p>
+          <a:p>
+            <a:pPr algn="l" marL="342900" indent="-342900">
               <a:lnSpc>
                 <a:spcPts val="1620"/>
               </a:lnSpc>
               <a:spcAft>
                 <a:spcPts val="300"/>
               </a:spcAft>
-              <a:buNone/>
+              <a:buSzPct val="100000"/>
+              <a:buChar char="•"/>
             </a:pPr>
             <a:r>
               <a:rPr lang="en-US" sz="1200" dirty="0">
@@ -2271,16 +2446,20 @@
                 <a:ea typeface="Verdana" pitchFamily="34" charset="-122"/>
                 <a:cs typeface="Verdana" pitchFamily="34" charset="-120"/>
               </a:rPr>
-              <a:t> Try problems with at least one factor being 5 (e.g. </a:t>
-            </a:r>
-            <a:pPr algn="l" indent="0" marL="0">
+              <a:t>Partner A reads a problem from the sheet. Partner B answers within 5 seconds (using fingers).</a:t>
+            </a:r>
+            <a:endParaRPr lang="en-US" sz="1200" dirty="0"/>
+          </a:p>
+          <a:p>
+            <a:pPr algn="l" marL="342900" indent="-342900">
               <a:lnSpc>
                 <a:spcPts val="1620"/>
               </a:lnSpc>
               <a:spcAft>
                 <a:spcPts val="300"/>
               </a:spcAft>
-              <a:buNone/>
+              <a:buSzPct val="100000"/>
+              <a:buChar char="•"/>
             </a:pPr>
             <a:r>
               <a:rPr lang="en-US" sz="1200" dirty="0">
@@ -2291,111 +2470,7 @@
                 <a:ea typeface="Verdana" pitchFamily="34" charset="-122"/>
                 <a:cs typeface="Verdana" pitchFamily="34" charset="-120"/>
               </a:rPr>
-              <a:t>5 × 8</a:t>
-            </a:r>
-            <a:pPr algn="l" indent="0" marL="0">
-              <a:lnSpc>
-                <a:spcPts val="1620"/>
-              </a:lnSpc>
-              <a:spcAft>
-                <a:spcPts val="300"/>
-              </a:spcAft>
-              <a:buNone/>
-            </a:pPr>
-            <a:r>
-              <a:rPr lang="en-US" sz="1200" dirty="0">
-                <a:solidFill>
-                  <a:srgbClr val="2C2C2C"/>
-                </a:solidFill>
-                <a:latin typeface="Verdana" pitchFamily="34" charset="0"/>
-                <a:ea typeface="Verdana" pitchFamily="34" charset="-122"/>
-                <a:cs typeface="Verdana" pitchFamily="34" charset="-120"/>
-              </a:rPr>
-              <a:t>, </a:t>
-            </a:r>
-            <a:pPr algn="l" indent="0" marL="0">
-              <a:lnSpc>
-                <a:spcPts val="1620"/>
-              </a:lnSpc>
-              <a:spcAft>
-                <a:spcPts val="300"/>
-              </a:spcAft>
-              <a:buNone/>
-            </a:pPr>
-            <a:r>
-              <a:rPr lang="en-US" sz="1200" dirty="0">
-                <a:solidFill>
-                  <a:srgbClr val="2C2C2C"/>
-                </a:solidFill>
-                <a:latin typeface="Verdana" pitchFamily="34" charset="0"/>
-                <a:ea typeface="Verdana" pitchFamily="34" charset="-122"/>
-                <a:cs typeface="Verdana" pitchFamily="34" charset="-120"/>
-              </a:rPr>
-              <a:t>5 × 9</a:t>
-            </a:r>
-            <a:pPr algn="l" indent="0" marL="0">
-              <a:lnSpc>
-                <a:spcPts val="1620"/>
-              </a:lnSpc>
-              <a:spcAft>
-                <a:spcPts val="300"/>
-              </a:spcAft>
-              <a:buNone/>
-            </a:pPr>
-            <a:r>
-              <a:rPr lang="en-US" sz="1200" dirty="0">
-                <a:solidFill>
-                  <a:srgbClr val="2C2C2C"/>
-                </a:solidFill>
-                <a:latin typeface="Verdana" pitchFamily="34" charset="0"/>
-                <a:ea typeface="Verdana" pitchFamily="34" charset="-122"/>
-                <a:cs typeface="Verdana" pitchFamily="34" charset="-120"/>
-              </a:rPr>
-              <a:t>). The trick still works! And: do all 16 in 60 seconds.</a:t>
-            </a:r>
-            <a:endParaRPr lang="en-US" sz="1200" dirty="0"/>
-          </a:p>
-          <a:p>
-            <a:pPr algn="l" marL="342900" indent="-342900">
-              <a:lnSpc>
-                <a:spcPts val="1620"/>
-              </a:lnSpc>
-              <a:spcAft>
-                <a:spcPts val="300"/>
-              </a:spcAft>
-              <a:buSzPct val="100000"/>
-              <a:buChar char="•"/>
-            </a:pPr>
-            <a:r>
-              <a:rPr lang="en-US" sz="1200" b="1" dirty="0">
-                <a:solidFill>
-                  <a:srgbClr val="2C2C2C"/>
-                </a:solidFill>
-                <a:latin typeface="Verdana" pitchFamily="34" charset="0"/>
-                <a:ea typeface="Verdana" pitchFamily="34" charset="-122"/>
-                <a:cs typeface="Verdana" pitchFamily="34" charset="-120"/>
-              </a:rPr>
-              <a:t>Tier down:</a:t>
-            </a:r>
-            <a:pPr algn="l" indent="0" marL="0">
-              <a:lnSpc>
-                <a:spcPts val="1620"/>
-              </a:lnSpc>
-              <a:spcAft>
-                <a:spcPts val="300"/>
-              </a:spcAft>
-              <a:buNone/>
-            </a:pPr>
-            <a:r>
-              <a:rPr lang="en-US" sz="1200" dirty="0">
-                <a:solidFill>
-                  <a:srgbClr val="2C2C2C"/>
-                </a:solidFill>
-                <a:latin typeface="Verdana" pitchFamily="34" charset="0"/>
-                <a:ea typeface="Verdana" pitchFamily="34" charset="-122"/>
-                <a:cs typeface="Verdana" pitchFamily="34" charset="-120"/>
-              </a:rPr>
-              <a:t> 8 problems instead of 16. Half the sheet is fine.</a:t>
+              <a:t>Swap. Cover 10 problems each.</a:t>
             </a:r>
             <a:endParaRPr lang="en-US" sz="1200" dirty="0"/>
           </a:p>
@@ -2553,7 +2628,7 @@
                 <a:ea typeface="Georgia" pitchFamily="34" charset="-122"/>
                 <a:cs typeface="Georgia" pitchFamily="34" charset="-120"/>
               </a:rPr>
-              <a:t>Teacher's quick notes</a:t>
+              <a:t>Wrap-up (4 min)</a:t>
             </a:r>
             <a:endParaRPr lang="en-US" sz="1800" dirty="0"/>
           </a:p>
@@ -2567,8 +2642,8 @@
         </p:nvSpPr>
         <p:spPr>
           <a:xfrm>
-            <a:off x="406301" y="870942"/>
-            <a:ext cx="8498026" cy="639812"/>
+            <a:off x="634901" y="883593"/>
+            <a:ext cx="8102798" cy="525661"/>
           </a:xfrm>
           <a:prstGeom prst="rect">
             <a:avLst/>
@@ -2580,17 +2655,15 @@
           <a:bodyPr wrap="square" lIns="0" tIns="0" rIns="0" bIns="0" rtlCol="0" anchor="t"/>
           <a:lstStyle/>
           <a:p>
-            <a:pPr algn="l" indent="0" marL="0">
-              <a:lnSpc>
-                <a:spcPts val="1680"/>
-              </a:lnSpc>
-              <a:spcBef>
-                <a:spcPts val="300"/>
-              </a:spcBef>
-              <a:spcAft>
-                <a:spcPts val="300"/>
-              </a:spcAft>
-              <a:buNone/>
+            <a:pPr algn="l" marL="342900" indent="-342900">
+              <a:lnSpc>
+                <a:spcPts val="1620"/>
+              </a:lnSpc>
+              <a:spcAft>
+                <a:spcPts val="300"/>
+              </a:spcAft>
+              <a:buSzPct val="100000"/>
+              <a:buChar char="•"/>
             </a:pPr>
             <a:r>
               <a:rPr lang="en-US" sz="1200" dirty="0">
@@ -2601,22 +2674,23 @@
                 <a:ea typeface="Verdana" pitchFamily="34" charset="-122"/>
                 <a:cs typeface="Verdana" pitchFamily="34" charset="-120"/>
               </a:rPr>
-              <a:t>– Don't make this competitive between children. </a:t>
-            </a:r>
-            <a:pPr algn="l" indent="0" marL="0">
-              <a:lnSpc>
-                <a:spcPts val="1680"/>
-              </a:lnSpc>
-              <a:spcBef>
-                <a:spcPts val="300"/>
-              </a:spcBef>
-              <a:spcAft>
-                <a:spcPts val="300"/>
-              </a:spcAft>
-              <a:buNone/>
-            </a:pPr>
-            <a:r>
-              <a:rPr lang="en-US" sz="1200" i="1" dirty="0">
+              <a:t>Hands up: who got all 16 right? Who beat their round-1 score?</a:t>
+            </a:r>
+            <a:endParaRPr lang="en-US" sz="1200" dirty="0"/>
+          </a:p>
+          <a:p>
+            <a:pPr algn="l" marL="342900" indent="-342900">
+              <a:lnSpc>
+                <a:spcPts val="1620"/>
+              </a:lnSpc>
+              <a:spcAft>
+                <a:spcPts val="300"/>
+              </a:spcAft>
+              <a:buSzPct val="100000"/>
+              <a:buChar char="•"/>
+            </a:pPr>
+            <a:r>
+              <a:rPr lang="en-US" sz="1200" dirty="0">
                 <a:solidFill>
                   <a:srgbClr val="2C2C2C"/>
                 </a:solidFill>
@@ -2624,8 +2698,33 @@
                 <a:ea typeface="Verdana" pitchFamily="34" charset="-122"/>
                 <a:cs typeface="Verdana" pitchFamily="34" charset="-120"/>
               </a:rPr>
-              <a:t>"Race yourself, not your neighbour."</a:t>
-            </a:r>
+              <a:t>Cheering. Final chant.</a:t>
+            </a:r>
+            <a:endParaRPr lang="en-US" sz="1200" dirty="0"/>
+          </a:p>
+        </p:txBody>
+      </p:sp>
+      <p:sp>
+        <p:nvSpPr>
+          <p:cNvPr id="5" name="Text 3"/>
+          <p:cNvSpPr/>
+          <p:nvPr/>
+        </p:nvSpPr>
+        <p:spPr>
+          <a:xfrm>
+            <a:off x="406301" y="4434929"/>
+            <a:ext cx="8498026" cy="213271"/>
+          </a:xfrm>
+          <a:prstGeom prst="rect">
+            <a:avLst/>
+          </a:prstGeom>
+          <a:noFill/>
+          <a:ln/>
+        </p:spPr>
+        <p:txBody>
+          <a:bodyPr wrap="square" lIns="0" tIns="0" rIns="0" bIns="0" rtlCol="0" anchor="t"/>
+          <a:lstStyle/>
+          <a:p>
             <a:pPr algn="l" indent="0" marL="0">
               <a:lnSpc>
                 <a:spcPts val="1680"/>
@@ -2647,7 +2746,783 @@
                 <a:ea typeface="Verdana" pitchFamily="34" charset="-122"/>
                 <a:cs typeface="Verdana" pitchFamily="34" charset="-120"/>
               </a:rPr>
-              <a:t> – A child who got 4/16 should celebrate — that's progress from yesterday's 0/16. – Some children will revert to memorised times-table answers. That's fine, but ask them to confirm with the finger trick.</a:t>
+              <a:t>Primary ·  · IKS Curriculum</a:t>
+            </a:r>
+            <a:endParaRPr lang="en-US" sz="1200" dirty="0"/>
+          </a:p>
+        </p:txBody>
+      </p:sp>
+    </p:spTree>
+  </p:cSld>
+  <p:clrMapOvr>
+    <a:masterClrMapping/>
+  </p:clrMapOvr>
+</p:sld>
+</file>
+
+<file path=ppt/slides/slide12.xml><?xml version="1.0" encoding="utf-8"?>
+<p:sld xmlns:a="http://schemas.openxmlformats.org/drawingml/2006/main" xmlns:r="http://schemas.openxmlformats.org/officeDocument/2006/relationships" xmlns:p="http://schemas.openxmlformats.org/presentationml/2006/main">
+  <p:cSld name="Slide 12">
+    <p:bg>
+      <p:bgPr>
+        <a:solidFill>
+          <a:srgbClr val="FAF7F2"/>
+        </a:solidFill>
+      </p:bgPr>
+    </p:bg>
+    <p:spTree>
+      <p:nvGrpSpPr>
+        <p:cNvPr id="1" name=""/>
+        <p:cNvGrpSpPr/>
+        <p:nvPr/>
+      </p:nvGrpSpPr>
+      <p:grpSpPr>
+        <a:xfrm>
+          <a:off x="0" y="0"/>
+          <a:ext cx="0" cy="0"/>
+          <a:chOff x="0" y="0"/>
+          <a:chExt cx="0" cy="0"/>
+        </a:xfrm>
+      </p:grpSpPr>
+      <p:sp>
+        <p:nvSpPr>
+          <p:cNvPr id="2" name="Text 0"/>
+          <p:cNvSpPr/>
+          <p:nvPr/>
+        </p:nvSpPr>
+        <p:spPr>
+          <a:xfrm>
+            <a:off x="0" y="0"/>
+            <a:ext cx="9144000" cy="101501"/>
+          </a:xfrm>
+          <a:prstGeom prst="rect">
+            <a:avLst/>
+          </a:prstGeom>
+          <a:solidFill>
+            <a:srgbClr val="87A96B"/>
+          </a:solidFill>
+          <a:ln/>
+        </p:spPr>
+        <p:txBody>
+          <a:bodyPr wrap="square" rtlCol="0" anchor="ctr"/>
+          <a:lstStyle/>
+          <a:p>
+            <a:pPr indent="0" marL="0">
+              <a:buNone/>
+            </a:pPr>
+            <a:endParaRPr lang="en-US" dirty="0"/>
+          </a:p>
+        </p:txBody>
+      </p:sp>
+      <p:sp>
+        <p:nvSpPr>
+          <p:cNvPr id="3" name="Text 1"/>
+          <p:cNvSpPr/>
+          <p:nvPr/>
+        </p:nvSpPr>
+        <p:spPr>
+          <a:xfrm>
+            <a:off x="406301" y="457051"/>
+            <a:ext cx="8498026" cy="274290"/>
+          </a:xfrm>
+          <a:prstGeom prst="rect">
+            <a:avLst/>
+          </a:prstGeom>
+          <a:noFill/>
+          <a:ln/>
+        </p:spPr>
+        <p:txBody>
+          <a:bodyPr wrap="square" lIns="0" tIns="0" rIns="0" bIns="0" rtlCol="0" anchor="t"/>
+          <a:lstStyle/>
+          <a:p>
+            <a:pPr algn="l" indent="0" marL="0">
+              <a:lnSpc>
+                <a:spcPts val="2160"/>
+              </a:lnSpc>
+              <a:spcBef>
+                <a:spcPts val="600"/>
+              </a:spcBef>
+              <a:spcAft>
+                <a:spcPts val="800"/>
+              </a:spcAft>
+              <a:buNone/>
+            </a:pPr>
+            <a:r>
+              <a:rPr lang="en-US" sz="1800" b="1" dirty="0">
+                <a:solidFill>
+                  <a:srgbClr val="E07A5F"/>
+                </a:solidFill>
+                <a:latin typeface="Georgia" pitchFamily="34" charset="0"/>
+                <a:ea typeface="Georgia" pitchFamily="34" charset="-122"/>
+                <a:cs typeface="Georgia" pitchFamily="34" charset="-120"/>
+              </a:rPr>
+              <a:t>Homework</a:t>
+            </a:r>
+            <a:endParaRPr lang="en-US" sz="1800" dirty="0"/>
+          </a:p>
+        </p:txBody>
+      </p:sp>
+      <p:sp>
+        <p:nvSpPr>
+          <p:cNvPr id="4" name="Text 2"/>
+          <p:cNvSpPr/>
+          <p:nvPr/>
+        </p:nvSpPr>
+        <p:spPr>
+          <a:xfrm>
+            <a:off x="634901" y="883593"/>
+            <a:ext cx="8102798" cy="281880"/>
+          </a:xfrm>
+          <a:prstGeom prst="rect">
+            <a:avLst/>
+          </a:prstGeom>
+          <a:noFill/>
+          <a:ln/>
+        </p:spPr>
+        <p:txBody>
+          <a:bodyPr wrap="square" lIns="0" tIns="0" rIns="0" bIns="0" rtlCol="0" anchor="t"/>
+          <a:lstStyle/>
+          <a:p>
+            <a:pPr algn="l" marL="342900" indent="-342900">
+              <a:lnSpc>
+                <a:spcPts val="1620"/>
+              </a:lnSpc>
+              <a:spcAft>
+                <a:spcPts val="300"/>
+              </a:spcAft>
+              <a:buSzPct val="100000"/>
+              <a:buChar char="•"/>
+            </a:pPr>
+            <a:r>
+              <a:rPr lang="en-US" sz="1200" dirty="0">
+                <a:solidFill>
+                  <a:srgbClr val="2C2C2C"/>
+                </a:solidFill>
+                <a:latin typeface="Verdana" pitchFamily="34" charset="0"/>
+                <a:ea typeface="Verdana" pitchFamily="34" charset="-122"/>
+                <a:cs typeface="Verdana" pitchFamily="34" charset="-120"/>
+              </a:rPr>
+              <a:t>Practice 6 × 6 through 9 × 9 at home. 5 minutes a day. Time yourself.</a:t>
+            </a:r>
+            <a:endParaRPr lang="en-US" sz="1200" dirty="0"/>
+          </a:p>
+        </p:txBody>
+      </p:sp>
+      <p:sp>
+        <p:nvSpPr>
+          <p:cNvPr id="5" name="Text 3"/>
+          <p:cNvSpPr/>
+          <p:nvPr/>
+        </p:nvSpPr>
+        <p:spPr>
+          <a:xfrm>
+            <a:off x="406301" y="4434929"/>
+            <a:ext cx="8498026" cy="213271"/>
+          </a:xfrm>
+          <a:prstGeom prst="rect">
+            <a:avLst/>
+          </a:prstGeom>
+          <a:noFill/>
+          <a:ln/>
+        </p:spPr>
+        <p:txBody>
+          <a:bodyPr wrap="square" lIns="0" tIns="0" rIns="0" bIns="0" rtlCol="0" anchor="t"/>
+          <a:lstStyle/>
+          <a:p>
+            <a:pPr algn="l" indent="0" marL="0">
+              <a:lnSpc>
+                <a:spcPts val="1680"/>
+              </a:lnSpc>
+              <a:spcBef>
+                <a:spcPts val="300"/>
+              </a:spcBef>
+              <a:spcAft>
+                <a:spcPts val="300"/>
+              </a:spcAft>
+              <a:buNone/>
+            </a:pPr>
+            <a:r>
+              <a:rPr lang="en-US" sz="1200" dirty="0">
+                <a:solidFill>
+                  <a:srgbClr val="2C2C2C"/>
+                </a:solidFill>
+                <a:latin typeface="Verdana" pitchFamily="34" charset="0"/>
+                <a:ea typeface="Verdana" pitchFamily="34" charset="-122"/>
+                <a:cs typeface="Verdana" pitchFamily="34" charset="-120"/>
+              </a:rPr>
+              <a:t>Primary ·  · IKS Curriculum</a:t>
+            </a:r>
+            <a:endParaRPr lang="en-US" sz="1200" dirty="0"/>
+          </a:p>
+        </p:txBody>
+      </p:sp>
+    </p:spTree>
+  </p:cSld>
+  <p:clrMapOvr>
+    <a:masterClrMapping/>
+  </p:clrMapOvr>
+</p:sld>
+</file>
+
+<file path=ppt/slides/slide13.xml><?xml version="1.0" encoding="utf-8"?>
+<p:sld xmlns:a="http://schemas.openxmlformats.org/drawingml/2006/main" xmlns:r="http://schemas.openxmlformats.org/officeDocument/2006/relationships" xmlns:p="http://schemas.openxmlformats.org/presentationml/2006/main">
+  <p:cSld name="Slide 13">
+    <p:bg>
+      <p:bgPr>
+        <a:solidFill>
+          <a:srgbClr val="FAF7F2"/>
+        </a:solidFill>
+      </p:bgPr>
+    </p:bg>
+    <p:spTree>
+      <p:nvGrpSpPr>
+        <p:cNvPr id="1" name=""/>
+        <p:cNvGrpSpPr/>
+        <p:nvPr/>
+      </p:nvGrpSpPr>
+      <p:grpSpPr>
+        <a:xfrm>
+          <a:off x="0" y="0"/>
+          <a:ext cx="0" cy="0"/>
+          <a:chOff x="0" y="0"/>
+          <a:chExt cx="0" cy="0"/>
+        </a:xfrm>
+      </p:grpSpPr>
+      <p:sp>
+        <p:nvSpPr>
+          <p:cNvPr id="2" name="Text 0"/>
+          <p:cNvSpPr/>
+          <p:nvPr/>
+        </p:nvSpPr>
+        <p:spPr>
+          <a:xfrm>
+            <a:off x="0" y="0"/>
+            <a:ext cx="9144000" cy="101501"/>
+          </a:xfrm>
+          <a:prstGeom prst="rect">
+            <a:avLst/>
+          </a:prstGeom>
+          <a:solidFill>
+            <a:srgbClr val="87A96B"/>
+          </a:solidFill>
+          <a:ln/>
+        </p:spPr>
+        <p:txBody>
+          <a:bodyPr wrap="square" rtlCol="0" anchor="ctr"/>
+          <a:lstStyle/>
+          <a:p>
+            <a:pPr indent="0" marL="0">
+              <a:buNone/>
+            </a:pPr>
+            <a:endParaRPr lang="en-US" dirty="0"/>
+          </a:p>
+        </p:txBody>
+      </p:sp>
+      <p:sp>
+        <p:nvSpPr>
+          <p:cNvPr id="3" name="Text 1"/>
+          <p:cNvSpPr/>
+          <p:nvPr/>
+        </p:nvSpPr>
+        <p:spPr>
+          <a:xfrm>
+            <a:off x="406301" y="457051"/>
+            <a:ext cx="8498026" cy="274290"/>
+          </a:xfrm>
+          <a:prstGeom prst="rect">
+            <a:avLst/>
+          </a:prstGeom>
+          <a:noFill/>
+          <a:ln/>
+        </p:spPr>
+        <p:txBody>
+          <a:bodyPr wrap="square" lIns="0" tIns="0" rIns="0" bIns="0" rtlCol="0" anchor="t"/>
+          <a:lstStyle/>
+          <a:p>
+            <a:pPr algn="l" indent="0" marL="0">
+              <a:lnSpc>
+                <a:spcPts val="2160"/>
+              </a:lnSpc>
+              <a:spcBef>
+                <a:spcPts val="600"/>
+              </a:spcBef>
+              <a:spcAft>
+                <a:spcPts val="800"/>
+              </a:spcAft>
+              <a:buNone/>
+            </a:pPr>
+            <a:r>
+              <a:rPr lang="en-US" sz="1800" b="1" dirty="0">
+                <a:solidFill>
+                  <a:srgbClr val="E07A5F"/>
+                </a:solidFill>
+                <a:latin typeface="Georgia" pitchFamily="34" charset="0"/>
+                <a:ea typeface="Georgia" pitchFamily="34" charset="-122"/>
+                <a:cs typeface="Georgia" pitchFamily="34" charset="-120"/>
+              </a:rPr>
+              <a:t>Differentiation</a:t>
+            </a:r>
+            <a:endParaRPr lang="en-US" sz="1800" dirty="0"/>
+          </a:p>
+        </p:txBody>
+      </p:sp>
+      <p:sp>
+        <p:nvSpPr>
+          <p:cNvPr id="4" name="Text 2"/>
+          <p:cNvSpPr/>
+          <p:nvPr/>
+        </p:nvSpPr>
+        <p:spPr>
+          <a:xfrm>
+            <a:off x="634901" y="883593"/>
+            <a:ext cx="8102798" cy="759916"/>
+          </a:xfrm>
+          <a:prstGeom prst="rect">
+            <a:avLst/>
+          </a:prstGeom>
+          <a:noFill/>
+          <a:ln/>
+        </p:spPr>
+        <p:txBody>
+          <a:bodyPr wrap="square" lIns="0" tIns="0" rIns="0" bIns="0" rtlCol="0" anchor="t"/>
+          <a:lstStyle/>
+          <a:p>
+            <a:pPr algn="l" marL="342900" indent="-342900">
+              <a:lnSpc>
+                <a:spcPts val="1620"/>
+              </a:lnSpc>
+              <a:spcAft>
+                <a:spcPts val="300"/>
+              </a:spcAft>
+              <a:buSzPct val="100000"/>
+              <a:buChar char="•"/>
+            </a:pPr>
+            <a:r>
+              <a:rPr lang="en-US" sz="1200" b="1" dirty="0">
+                <a:solidFill>
+                  <a:srgbClr val="2C2C2C"/>
+                </a:solidFill>
+                <a:latin typeface="Verdana" pitchFamily="34" charset="0"/>
+                <a:ea typeface="Verdana" pitchFamily="34" charset="-122"/>
+                <a:cs typeface="Verdana" pitchFamily="34" charset="-120"/>
+              </a:rPr>
+              <a:t>Tier up:</a:t>
+            </a:r>
+            <a:pPr algn="l" indent="0" marL="0">
+              <a:lnSpc>
+                <a:spcPts val="1620"/>
+              </a:lnSpc>
+              <a:spcAft>
+                <a:spcPts val="300"/>
+              </a:spcAft>
+              <a:buNone/>
+            </a:pPr>
+            <a:r>
+              <a:rPr lang="en-US" sz="1200" dirty="0">
+                <a:solidFill>
+                  <a:srgbClr val="2C2C2C"/>
+                </a:solidFill>
+                <a:latin typeface="Verdana" pitchFamily="34" charset="0"/>
+                <a:ea typeface="Verdana" pitchFamily="34" charset="-122"/>
+                <a:cs typeface="Verdana" pitchFamily="34" charset="-120"/>
+              </a:rPr>
+              <a:t> Try problems with at least one factor being 5 (e.g. </a:t>
+            </a:r>
+            <a:pPr algn="l" indent="0" marL="0">
+              <a:lnSpc>
+                <a:spcPts val="1620"/>
+              </a:lnSpc>
+              <a:spcAft>
+                <a:spcPts val="300"/>
+              </a:spcAft>
+              <a:buNone/>
+            </a:pPr>
+            <a:r>
+              <a:rPr lang="en-US" sz="1200" dirty="0">
+                <a:solidFill>
+                  <a:srgbClr val="2C2C2C"/>
+                </a:solidFill>
+                <a:latin typeface="Verdana" pitchFamily="34" charset="0"/>
+                <a:ea typeface="Verdana" pitchFamily="34" charset="-122"/>
+                <a:cs typeface="Verdana" pitchFamily="34" charset="-120"/>
+              </a:rPr>
+              <a:t>5 × 8</a:t>
+            </a:r>
+            <a:pPr algn="l" indent="0" marL="0">
+              <a:lnSpc>
+                <a:spcPts val="1620"/>
+              </a:lnSpc>
+              <a:spcAft>
+                <a:spcPts val="300"/>
+              </a:spcAft>
+              <a:buNone/>
+            </a:pPr>
+            <a:r>
+              <a:rPr lang="en-US" sz="1200" dirty="0">
+                <a:solidFill>
+                  <a:srgbClr val="2C2C2C"/>
+                </a:solidFill>
+                <a:latin typeface="Verdana" pitchFamily="34" charset="0"/>
+                <a:ea typeface="Verdana" pitchFamily="34" charset="-122"/>
+                <a:cs typeface="Verdana" pitchFamily="34" charset="-120"/>
+              </a:rPr>
+              <a:t>, </a:t>
+            </a:r>
+            <a:pPr algn="l" indent="0" marL="0">
+              <a:lnSpc>
+                <a:spcPts val="1620"/>
+              </a:lnSpc>
+              <a:spcAft>
+                <a:spcPts val="300"/>
+              </a:spcAft>
+              <a:buNone/>
+            </a:pPr>
+            <a:r>
+              <a:rPr lang="en-US" sz="1200" dirty="0">
+                <a:solidFill>
+                  <a:srgbClr val="2C2C2C"/>
+                </a:solidFill>
+                <a:latin typeface="Verdana" pitchFamily="34" charset="0"/>
+                <a:ea typeface="Verdana" pitchFamily="34" charset="-122"/>
+                <a:cs typeface="Verdana" pitchFamily="34" charset="-120"/>
+              </a:rPr>
+              <a:t>5 × 9</a:t>
+            </a:r>
+            <a:pPr algn="l" indent="0" marL="0">
+              <a:lnSpc>
+                <a:spcPts val="1620"/>
+              </a:lnSpc>
+              <a:spcAft>
+                <a:spcPts val="300"/>
+              </a:spcAft>
+              <a:buNone/>
+            </a:pPr>
+            <a:r>
+              <a:rPr lang="en-US" sz="1200" dirty="0">
+                <a:solidFill>
+                  <a:srgbClr val="2C2C2C"/>
+                </a:solidFill>
+                <a:latin typeface="Verdana" pitchFamily="34" charset="0"/>
+                <a:ea typeface="Verdana" pitchFamily="34" charset="-122"/>
+                <a:cs typeface="Verdana" pitchFamily="34" charset="-120"/>
+              </a:rPr>
+              <a:t>). The trick still works! And: do all 16 in 60 seconds.</a:t>
+            </a:r>
+            <a:endParaRPr lang="en-US" sz="1200" dirty="0"/>
+          </a:p>
+          <a:p>
+            <a:pPr algn="l" marL="342900" indent="-342900">
+              <a:lnSpc>
+                <a:spcPts val="1620"/>
+              </a:lnSpc>
+              <a:spcAft>
+                <a:spcPts val="300"/>
+              </a:spcAft>
+              <a:buSzPct val="100000"/>
+              <a:buChar char="•"/>
+            </a:pPr>
+            <a:r>
+              <a:rPr lang="en-US" sz="1200" b="1" dirty="0">
+                <a:solidFill>
+                  <a:srgbClr val="2C2C2C"/>
+                </a:solidFill>
+                <a:latin typeface="Verdana" pitchFamily="34" charset="0"/>
+                <a:ea typeface="Verdana" pitchFamily="34" charset="-122"/>
+                <a:cs typeface="Verdana" pitchFamily="34" charset="-120"/>
+              </a:rPr>
+              <a:t>Tier down:</a:t>
+            </a:r>
+            <a:pPr algn="l" indent="0" marL="0">
+              <a:lnSpc>
+                <a:spcPts val="1620"/>
+              </a:lnSpc>
+              <a:spcAft>
+                <a:spcPts val="300"/>
+              </a:spcAft>
+              <a:buNone/>
+            </a:pPr>
+            <a:r>
+              <a:rPr lang="en-US" sz="1200" dirty="0">
+                <a:solidFill>
+                  <a:srgbClr val="2C2C2C"/>
+                </a:solidFill>
+                <a:latin typeface="Verdana" pitchFamily="34" charset="0"/>
+                <a:ea typeface="Verdana" pitchFamily="34" charset="-122"/>
+                <a:cs typeface="Verdana" pitchFamily="34" charset="-120"/>
+              </a:rPr>
+              <a:t> 8 problems instead of 16. Half the sheet is fine.</a:t>
+            </a:r>
+            <a:endParaRPr lang="en-US" sz="1200" dirty="0"/>
+          </a:p>
+        </p:txBody>
+      </p:sp>
+      <p:sp>
+        <p:nvSpPr>
+          <p:cNvPr id="5" name="Text 3"/>
+          <p:cNvSpPr/>
+          <p:nvPr/>
+        </p:nvSpPr>
+        <p:spPr>
+          <a:xfrm>
+            <a:off x="406301" y="4434929"/>
+            <a:ext cx="8498026" cy="213271"/>
+          </a:xfrm>
+          <a:prstGeom prst="rect">
+            <a:avLst/>
+          </a:prstGeom>
+          <a:noFill/>
+          <a:ln/>
+        </p:spPr>
+        <p:txBody>
+          <a:bodyPr wrap="square" lIns="0" tIns="0" rIns="0" bIns="0" rtlCol="0" anchor="t"/>
+          <a:lstStyle/>
+          <a:p>
+            <a:pPr algn="l" indent="0" marL="0">
+              <a:lnSpc>
+                <a:spcPts val="1680"/>
+              </a:lnSpc>
+              <a:spcBef>
+                <a:spcPts val="300"/>
+              </a:spcBef>
+              <a:spcAft>
+                <a:spcPts val="300"/>
+              </a:spcAft>
+              <a:buNone/>
+            </a:pPr>
+            <a:r>
+              <a:rPr lang="en-US" sz="1200" dirty="0">
+                <a:solidFill>
+                  <a:srgbClr val="2C2C2C"/>
+                </a:solidFill>
+                <a:latin typeface="Verdana" pitchFamily="34" charset="0"/>
+                <a:ea typeface="Verdana" pitchFamily="34" charset="-122"/>
+                <a:cs typeface="Verdana" pitchFamily="34" charset="-120"/>
+              </a:rPr>
+              <a:t>Primary ·  · IKS Curriculum</a:t>
+            </a:r>
+            <a:endParaRPr lang="en-US" sz="1200" dirty="0"/>
+          </a:p>
+        </p:txBody>
+      </p:sp>
+    </p:spTree>
+  </p:cSld>
+  <p:clrMapOvr>
+    <a:masterClrMapping/>
+  </p:clrMapOvr>
+</p:sld>
+</file>
+
+<file path=ppt/slides/slide14.xml><?xml version="1.0" encoding="utf-8"?>
+<p:sld xmlns:a="http://schemas.openxmlformats.org/drawingml/2006/main" xmlns:r="http://schemas.openxmlformats.org/officeDocument/2006/relationships" xmlns:p="http://schemas.openxmlformats.org/presentationml/2006/main">
+  <p:cSld name="Slide 14">
+    <p:bg>
+      <p:bgPr>
+        <a:solidFill>
+          <a:srgbClr val="FAF7F2"/>
+        </a:solidFill>
+      </p:bgPr>
+    </p:bg>
+    <p:spTree>
+      <p:nvGrpSpPr>
+        <p:cNvPr id="1" name=""/>
+        <p:cNvGrpSpPr/>
+        <p:nvPr/>
+      </p:nvGrpSpPr>
+      <p:grpSpPr>
+        <a:xfrm>
+          <a:off x="0" y="0"/>
+          <a:ext cx="0" cy="0"/>
+          <a:chOff x="0" y="0"/>
+          <a:chExt cx="0" cy="0"/>
+        </a:xfrm>
+      </p:grpSpPr>
+      <p:sp>
+        <p:nvSpPr>
+          <p:cNvPr id="2" name="Text 0"/>
+          <p:cNvSpPr/>
+          <p:nvPr/>
+        </p:nvSpPr>
+        <p:spPr>
+          <a:xfrm>
+            <a:off x="0" y="0"/>
+            <a:ext cx="9144000" cy="101501"/>
+          </a:xfrm>
+          <a:prstGeom prst="rect">
+            <a:avLst/>
+          </a:prstGeom>
+          <a:solidFill>
+            <a:srgbClr val="87A96B"/>
+          </a:solidFill>
+          <a:ln/>
+        </p:spPr>
+        <p:txBody>
+          <a:bodyPr wrap="square" rtlCol="0" anchor="ctr"/>
+          <a:lstStyle/>
+          <a:p>
+            <a:pPr indent="0" marL="0">
+              <a:buNone/>
+            </a:pPr>
+            <a:endParaRPr lang="en-US" dirty="0"/>
+          </a:p>
+        </p:txBody>
+      </p:sp>
+      <p:sp>
+        <p:nvSpPr>
+          <p:cNvPr id="3" name="Text 1"/>
+          <p:cNvSpPr/>
+          <p:nvPr/>
+        </p:nvSpPr>
+        <p:spPr>
+          <a:xfrm>
+            <a:off x="406301" y="457051"/>
+            <a:ext cx="8498026" cy="274290"/>
+          </a:xfrm>
+          <a:prstGeom prst="rect">
+            <a:avLst/>
+          </a:prstGeom>
+          <a:noFill/>
+          <a:ln/>
+        </p:spPr>
+        <p:txBody>
+          <a:bodyPr wrap="square" lIns="0" tIns="0" rIns="0" bIns="0" rtlCol="0" anchor="t"/>
+          <a:lstStyle/>
+          <a:p>
+            <a:pPr algn="l" indent="0" marL="0">
+              <a:lnSpc>
+                <a:spcPts val="2160"/>
+              </a:lnSpc>
+              <a:spcBef>
+                <a:spcPts val="600"/>
+              </a:spcBef>
+              <a:spcAft>
+                <a:spcPts val="800"/>
+              </a:spcAft>
+              <a:buNone/>
+            </a:pPr>
+            <a:r>
+              <a:rPr lang="en-US" sz="1800" b="1" dirty="0">
+                <a:solidFill>
+                  <a:srgbClr val="E07A5F"/>
+                </a:solidFill>
+                <a:latin typeface="Georgia" pitchFamily="34" charset="0"/>
+                <a:ea typeface="Georgia" pitchFamily="34" charset="-122"/>
+                <a:cs typeface="Georgia" pitchFamily="34" charset="-120"/>
+              </a:rPr>
+              <a:t>Teacher's quick notes</a:t>
+            </a:r>
+            <a:endParaRPr lang="en-US" sz="1800" dirty="0"/>
+          </a:p>
+        </p:txBody>
+      </p:sp>
+      <p:sp>
+        <p:nvSpPr>
+          <p:cNvPr id="4" name="Text 2"/>
+          <p:cNvSpPr/>
+          <p:nvPr/>
+        </p:nvSpPr>
+        <p:spPr>
+          <a:xfrm>
+            <a:off x="634901" y="883593"/>
+            <a:ext cx="8102798" cy="975122"/>
+          </a:xfrm>
+          <a:prstGeom prst="rect">
+            <a:avLst/>
+          </a:prstGeom>
+          <a:noFill/>
+          <a:ln/>
+        </p:spPr>
+        <p:txBody>
+          <a:bodyPr wrap="square" lIns="0" tIns="0" rIns="0" bIns="0" rtlCol="0" anchor="t"/>
+          <a:lstStyle/>
+          <a:p>
+            <a:pPr algn="l" marL="342900" indent="-342900">
+              <a:lnSpc>
+                <a:spcPts val="1620"/>
+              </a:lnSpc>
+              <a:spcAft>
+                <a:spcPts val="300"/>
+              </a:spcAft>
+              <a:buSzPct val="100000"/>
+              <a:buChar char="•"/>
+            </a:pPr>
+            <a:r>
+              <a:rPr lang="en-US" sz="1200" dirty="0">
+                <a:solidFill>
+                  <a:srgbClr val="2C2C2C"/>
+                </a:solidFill>
+                <a:latin typeface="Verdana" pitchFamily="34" charset="0"/>
+                <a:ea typeface="Verdana" pitchFamily="34" charset="-122"/>
+                <a:cs typeface="Verdana" pitchFamily="34" charset="-120"/>
+              </a:rPr>
+              <a:t>Don't make this competitive between children. </a:t>
+            </a:r>
+            <a:pPr algn="l" indent="0" marL="0">
+              <a:lnSpc>
+                <a:spcPts val="1620"/>
+              </a:lnSpc>
+              <a:spcAft>
+                <a:spcPts val="300"/>
+              </a:spcAft>
+              <a:buNone/>
+            </a:pPr>
+            <a:r>
+              <a:rPr lang="en-US" sz="1200" i="1" dirty="0">
+                <a:solidFill>
+                  <a:srgbClr val="2C2C2C"/>
+                </a:solidFill>
+                <a:latin typeface="Verdana" pitchFamily="34" charset="0"/>
+                <a:ea typeface="Verdana" pitchFamily="34" charset="-122"/>
+                <a:cs typeface="Verdana" pitchFamily="34" charset="-120"/>
+              </a:rPr>
+              <a:t>"Race yourself, not your neighbour."</a:t>
+            </a:r>
+            <a:endParaRPr lang="en-US" sz="1200" dirty="0"/>
+          </a:p>
+          <a:p>
+            <a:pPr algn="l" marL="342900" indent="-342900">
+              <a:lnSpc>
+                <a:spcPts val="1620"/>
+              </a:lnSpc>
+              <a:spcAft>
+                <a:spcPts val="300"/>
+              </a:spcAft>
+              <a:buSzPct val="100000"/>
+              <a:buChar char="•"/>
+            </a:pPr>
+            <a:r>
+              <a:rPr lang="en-US" sz="1200" dirty="0">
+                <a:solidFill>
+                  <a:srgbClr val="2C2C2C"/>
+                </a:solidFill>
+                <a:latin typeface="Verdana" pitchFamily="34" charset="0"/>
+                <a:ea typeface="Verdana" pitchFamily="34" charset="-122"/>
+                <a:cs typeface="Verdana" pitchFamily="34" charset="-120"/>
+              </a:rPr>
+              <a:t>A child who got 4/16 should celebrate — that's progress from yesterday's 0/16.</a:t>
+            </a:r>
+            <a:endParaRPr lang="en-US" sz="1200" dirty="0"/>
+          </a:p>
+          <a:p>
+            <a:pPr algn="l" marL="342900" indent="-342900">
+              <a:lnSpc>
+                <a:spcPts val="1620"/>
+              </a:lnSpc>
+              <a:spcAft>
+                <a:spcPts val="300"/>
+              </a:spcAft>
+              <a:buSzPct val="100000"/>
+              <a:buChar char="•"/>
+            </a:pPr>
+            <a:r>
+              <a:rPr lang="en-US" sz="1200" dirty="0">
+                <a:solidFill>
+                  <a:srgbClr val="2C2C2C"/>
+                </a:solidFill>
+                <a:latin typeface="Verdana" pitchFamily="34" charset="0"/>
+                <a:ea typeface="Verdana" pitchFamily="34" charset="-122"/>
+                <a:cs typeface="Verdana" pitchFamily="34" charset="-120"/>
+              </a:rPr>
+              <a:t>Some children will revert to memorised times-table answers. That's fine, but ask them to confirm with the finger trick.</a:t>
             </a:r>
             <a:endParaRPr lang="en-US" sz="1200" dirty="0"/>
           </a:p>
@@ -2805,7 +3680,7 @@
                 <a:ea typeface="Georgia" pitchFamily="34" charset="-122"/>
                 <a:cs typeface="Georgia" pitchFamily="34" charset="-120"/>
               </a:rPr>
-              <a:t>Materials</a:t>
+              <a:t>Goal</a:t>
             </a:r>
             <a:endParaRPr lang="en-US" sz="1800" dirty="0"/>
           </a:p>
@@ -2853,7 +3728,7 @@
                 <a:ea typeface="Verdana" pitchFamily="34" charset="-122"/>
                 <a:cs typeface="Verdana" pitchFamily="34" charset="-120"/>
               </a:rPr>
-              <a:t>– A "Race Sheet" — 16 problems (all combinations 6×6 through 9×9) on a single page. – Stopwatch.</a:t>
+              <a:t>Children speed up the finger trick to under 5 seconds per problem.</a:t>
             </a:r>
             <a:endParaRPr lang="en-US" sz="1200" dirty="0"/>
           </a:p>
@@ -3011,7 +3886,7 @@
                 <a:ea typeface="Georgia" pitchFamily="34" charset="-122"/>
                 <a:cs typeface="Georgia" pitchFamily="34" charset="-120"/>
               </a:rPr>
-              <a:t>The flow</a:t>
+              <a:t>Materials</a:t>
             </a:r>
             <a:endParaRPr lang="en-US" sz="1800" dirty="0"/>
           </a:p>
@@ -3020,6 +3895,76 @@
       <p:sp>
         <p:nvSpPr>
           <p:cNvPr id="4" name="Text 2"/>
+          <p:cNvSpPr/>
+          <p:nvPr/>
+        </p:nvSpPr>
+        <p:spPr>
+          <a:xfrm>
+            <a:off x="634901" y="883593"/>
+            <a:ext cx="8102798" cy="525661"/>
+          </a:xfrm>
+          <a:prstGeom prst="rect">
+            <a:avLst/>
+          </a:prstGeom>
+          <a:noFill/>
+          <a:ln/>
+        </p:spPr>
+        <p:txBody>
+          <a:bodyPr wrap="square" lIns="0" tIns="0" rIns="0" bIns="0" rtlCol="0" anchor="t"/>
+          <a:lstStyle/>
+          <a:p>
+            <a:pPr algn="l" marL="342900" indent="-342900">
+              <a:lnSpc>
+                <a:spcPts val="1620"/>
+              </a:lnSpc>
+              <a:spcAft>
+                <a:spcPts val="300"/>
+              </a:spcAft>
+              <a:buSzPct val="100000"/>
+              <a:buChar char="•"/>
+            </a:pPr>
+            <a:r>
+              <a:rPr lang="en-US" sz="1200" dirty="0">
+                <a:solidFill>
+                  <a:srgbClr val="2C2C2C"/>
+                </a:solidFill>
+                <a:latin typeface="Verdana" pitchFamily="34" charset="0"/>
+                <a:ea typeface="Verdana" pitchFamily="34" charset="-122"/>
+                <a:cs typeface="Verdana" pitchFamily="34" charset="-120"/>
+              </a:rPr>
+              <a:t>A "Race Sheet" — 16 problems (all combinations 6×6 through 9×9) on a single page.</a:t>
+            </a:r>
+            <a:endParaRPr lang="en-US" sz="1200" dirty="0"/>
+          </a:p>
+          <a:p>
+            <a:pPr algn="l" marL="342900" indent="-342900">
+              <a:lnSpc>
+                <a:spcPts val="1620"/>
+              </a:lnSpc>
+              <a:spcAft>
+                <a:spcPts val="300"/>
+              </a:spcAft>
+              <a:buSzPct val="100000"/>
+              <a:buChar char="•"/>
+            </a:pPr>
+            <a:r>
+              <a:rPr lang="en-US" sz="1200" dirty="0">
+                <a:solidFill>
+                  <a:srgbClr val="2C2C2C"/>
+                </a:solidFill>
+                <a:latin typeface="Verdana" pitchFamily="34" charset="0"/>
+                <a:ea typeface="Verdana" pitchFamily="34" charset="-122"/>
+                <a:cs typeface="Verdana" pitchFamily="34" charset="-120"/>
+              </a:rPr>
+              <a:t>Stopwatch.</a:t>
+            </a:r>
+            <a:endParaRPr lang="en-US" sz="1200" dirty="0"/>
+          </a:p>
+        </p:txBody>
+      </p:sp>
+      <p:sp>
+        <p:nvSpPr>
+          <p:cNvPr id="5" name="Text 3"/>
           <p:cNvSpPr/>
           <p:nvPr/>
         </p:nvSpPr>
@@ -3169,7 +4114,7 @@
                 <a:ea typeface="Georgia" pitchFamily="34" charset="-122"/>
                 <a:cs typeface="Georgia" pitchFamily="34" charset="-120"/>
               </a:rPr>
-              <a:t>Settle + chant (3 min)</a:t>
+              <a:t>The flow</a:t>
             </a:r>
             <a:endParaRPr lang="en-US" sz="1800" dirty="0"/>
           </a:p>
@@ -3178,54 +4123,6 @@
       <p:sp>
         <p:nvSpPr>
           <p:cNvPr id="4" name="Text 2"/>
-          <p:cNvSpPr/>
-          <p:nvPr/>
-        </p:nvSpPr>
-        <p:spPr>
-          <a:xfrm>
-            <a:off x="406301" y="870942"/>
-            <a:ext cx="8498026" cy="213271"/>
-          </a:xfrm>
-          <a:prstGeom prst="rect">
-            <a:avLst/>
-          </a:prstGeom>
-          <a:noFill/>
-          <a:ln/>
-        </p:spPr>
-        <p:txBody>
-          <a:bodyPr wrap="square" lIns="0" tIns="0" rIns="0" bIns="0" rtlCol="0" anchor="t"/>
-          <a:lstStyle/>
-          <a:p>
-            <a:pPr algn="l" indent="0" marL="0">
-              <a:lnSpc>
-                <a:spcPts val="1680"/>
-              </a:lnSpc>
-              <a:spcBef>
-                <a:spcPts val="300"/>
-              </a:spcBef>
-              <a:spcAft>
-                <a:spcPts val="300"/>
-              </a:spcAft>
-              <a:buNone/>
-            </a:pPr>
-            <a:r>
-              <a:rPr lang="en-US" sz="1200" dirty="0">
-                <a:solidFill>
-                  <a:srgbClr val="2C2C2C"/>
-                </a:solidFill>
-                <a:latin typeface="Verdana" pitchFamily="34" charset="0"/>
-                <a:ea typeface="Verdana" pitchFamily="34" charset="-122"/>
-                <a:cs typeface="Verdana" pitchFamily="34" charset="-120"/>
-              </a:rPr>
-              <a:t>Twins chant + 5 finger-trick chorus answers.</a:t>
-            </a:r>
-            <a:endParaRPr lang="en-US" sz="1200" dirty="0"/>
-          </a:p>
-        </p:txBody>
-      </p:sp>
-      <p:sp>
-        <p:nvSpPr>
-          <p:cNvPr id="5" name="Text 3"/>
           <p:cNvSpPr/>
           <p:nvPr/>
         </p:nvSpPr>
@@ -3375,7 +4272,7 @@
                 <a:ea typeface="Georgia" pitchFamily="34" charset="-122"/>
                 <a:cs typeface="Georgia" pitchFamily="34" charset="-120"/>
               </a:rPr>
-              <a:t>Race round 1 (8 min)</a:t>
+              <a:t>Settle + chant (3 min)</a:t>
             </a:r>
             <a:endParaRPr lang="en-US" sz="1800" dirty="0"/>
           </a:p>
@@ -3390,7 +4287,7 @@
         <p:spPr>
           <a:xfrm>
             <a:off x="406301" y="870942"/>
-            <a:ext cx="8498026" cy="639812"/>
+            <a:ext cx="8498026" cy="213271"/>
           </a:xfrm>
           <a:prstGeom prst="rect">
             <a:avLst/>
@@ -3423,7 +4320,7 @@
                 <a:ea typeface="Verdana" pitchFamily="34" charset="-122"/>
                 <a:cs typeface="Verdana" pitchFamily="34" charset="-120"/>
               </a:rPr>
-              <a:t>– Pass out the Race Sheet (face-down). – On "Go," flip and solve all 16 problems using the finger trick. As fast as possible. – After 3 minutes, "Stop." Note how far each child got and how many were correct. – Self-correct against the answer key.</a:t>
+              <a:t>Twins chant + 5 finger-trick chorus answers.</a:t>
             </a:r>
             <a:endParaRPr lang="en-US" sz="1200" dirty="0"/>
           </a:p>
@@ -3432,544 +4329,6 @@
       <p:sp>
         <p:nvSpPr>
           <p:cNvPr id="5" name="Text 3"/>
-          <p:cNvSpPr/>
-          <p:nvPr/>
-        </p:nvSpPr>
-        <p:spPr>
-          <a:xfrm>
-            <a:off x="406301" y="1586954"/>
-            <a:ext cx="8498026" cy="213271"/>
-          </a:xfrm>
-          <a:prstGeom prst="rect">
-            <a:avLst/>
-          </a:prstGeom>
-          <a:noFill/>
-          <a:ln/>
-        </p:spPr>
-        <p:txBody>
-          <a:bodyPr wrap="square" lIns="0" tIns="0" rIns="0" bIns="0" rtlCol="0" anchor="t"/>
-          <a:lstStyle/>
-          <a:p>
-            <a:pPr algn="l" indent="0" marL="0">
-              <a:lnSpc>
-                <a:spcPts val="1680"/>
-              </a:lnSpc>
-              <a:spcBef>
-                <a:spcPts val="300"/>
-              </a:spcBef>
-              <a:spcAft>
-                <a:spcPts val="300"/>
-              </a:spcAft>
-              <a:buNone/>
-            </a:pPr>
-            <a:r>
-              <a:rPr lang="en-US" sz="1200" dirty="0">
-                <a:solidFill>
-                  <a:srgbClr val="2C2C2C"/>
-                </a:solidFill>
-                <a:latin typeface="Verdana" pitchFamily="34" charset="0"/>
-                <a:ea typeface="Verdana" pitchFamily="34" charset="-122"/>
-                <a:cs typeface="Verdana" pitchFamily="34" charset="-120"/>
-              </a:rPr>
-              <a:t>Race Sheet:</a:t>
-            </a:r>
-            <a:endParaRPr lang="en-US" sz="1200" dirty="0"/>
-          </a:p>
-        </p:txBody>
-      </p:sp>
-      <p:sp>
-        <p:nvSpPr>
-          <p:cNvPr id="6" name="Text 4"/>
-          <p:cNvSpPr/>
-          <p:nvPr/>
-        </p:nvSpPr>
-        <p:spPr>
-          <a:xfrm>
-            <a:off x="406301" y="1889075"/>
-            <a:ext cx="8331398" cy="952202"/>
-          </a:xfrm>
-          <a:prstGeom prst="rect">
-            <a:avLst/>
-          </a:prstGeom>
-          <a:solidFill>
-            <a:srgbClr val="FFFFFF"/>
-          </a:solidFill>
-          <a:ln/>
-        </p:spPr>
-        <p:txBody>
-          <a:bodyPr wrap="square" rtlCol="0" anchor="ctr"/>
-          <a:lstStyle/>
-          <a:p>
-            <a:pPr indent="0" marL="0">
-              <a:buNone/>
-            </a:pPr>
-            <a:endParaRPr lang="en-US" dirty="0"/>
-          </a:p>
-        </p:txBody>
-      </p:sp>
-      <p:sp>
-        <p:nvSpPr>
-          <p:cNvPr id="7" name="Shape 5"/>
-          <p:cNvSpPr/>
-          <p:nvPr/>
-        </p:nvSpPr>
-        <p:spPr>
-          <a:xfrm>
-            <a:off x="430113" y="1889075"/>
-            <a:ext cx="0" cy="952202"/>
-          </a:xfrm>
-          <a:prstGeom prst="line">
-            <a:avLst/>
-          </a:prstGeom>
-          <a:noFill/>
-          <a:ln w="47625">
-            <a:solidFill>
-              <a:srgbClr val="87A96B"/>
-            </a:solidFill>
-            <a:prstDash val="solid"/>
-          </a:ln>
-        </p:spPr>
-      </p:sp>
-      <p:sp>
-        <p:nvSpPr>
-          <p:cNvPr id="8" name="Text 6"/>
-          <p:cNvSpPr/>
-          <p:nvPr/>
-        </p:nvSpPr>
-        <p:spPr>
-          <a:xfrm>
-            <a:off x="631627" y="2016026"/>
-            <a:ext cx="8086939" cy="174575"/>
-          </a:xfrm>
-          <a:prstGeom prst="rect">
-            <a:avLst/>
-          </a:prstGeom>
-          <a:noFill/>
-          <a:ln/>
-        </p:spPr>
-        <p:txBody>
-          <a:bodyPr wrap="square" lIns="0" tIns="0" rIns="0" bIns="0" rtlCol="0" anchor="t"/>
-          <a:lstStyle/>
-          <a:p>
-            <a:pPr algn="l" indent="0" marL="0">
-              <a:lnSpc>
-                <a:spcPts val="1375"/>
-              </a:lnSpc>
-              <a:buNone/>
-            </a:pPr>
-            <a:r>
-              <a:rPr lang="en-US" sz="1100" dirty="0">
-                <a:solidFill>
-                  <a:srgbClr val="2C2C2C"/>
-                </a:solidFill>
-                <a:latin typeface="Courier New" pitchFamily="34" charset="0"/>
-                <a:ea typeface="Courier New" pitchFamily="34" charset="-122"/>
-                <a:cs typeface="Courier New" pitchFamily="34" charset="-120"/>
-              </a:rPr>
-              <a:t>6×6 = ___      7×6 = ___      8×6 = ___      9×6 = ___</a:t>
-            </a:r>
-            <a:endParaRPr lang="en-US" sz="1100" dirty="0"/>
-          </a:p>
-        </p:txBody>
-      </p:sp>
-      <p:sp>
-        <p:nvSpPr>
-          <p:cNvPr id="9" name="Text 7"/>
-          <p:cNvSpPr/>
-          <p:nvPr/>
-        </p:nvSpPr>
-        <p:spPr>
-          <a:xfrm>
-            <a:off x="631627" y="2190601"/>
-            <a:ext cx="8086939" cy="174575"/>
-          </a:xfrm>
-          <a:prstGeom prst="rect">
-            <a:avLst/>
-          </a:prstGeom>
-          <a:noFill/>
-          <a:ln/>
-        </p:spPr>
-        <p:txBody>
-          <a:bodyPr wrap="square" lIns="0" tIns="0" rIns="0" bIns="0" rtlCol="0" anchor="t"/>
-          <a:lstStyle/>
-          <a:p>
-            <a:pPr algn="l" indent="0" marL="0">
-              <a:lnSpc>
-                <a:spcPts val="1375"/>
-              </a:lnSpc>
-              <a:buNone/>
-            </a:pPr>
-            <a:r>
-              <a:rPr lang="en-US" sz="1100" dirty="0">
-                <a:solidFill>
-                  <a:srgbClr val="2C2C2C"/>
-                </a:solidFill>
-                <a:latin typeface="Courier New" pitchFamily="34" charset="0"/>
-                <a:ea typeface="Courier New" pitchFamily="34" charset="-122"/>
-                <a:cs typeface="Courier New" pitchFamily="34" charset="-120"/>
-              </a:rPr>
-              <a:t>6×7 = ___      7×7 = ___      8×7 = ___      9×7 = ___</a:t>
-            </a:r>
-            <a:endParaRPr lang="en-US" sz="1100" dirty="0"/>
-          </a:p>
-        </p:txBody>
-      </p:sp>
-      <p:sp>
-        <p:nvSpPr>
-          <p:cNvPr id="10" name="Text 8"/>
-          <p:cNvSpPr/>
-          <p:nvPr/>
-        </p:nvSpPr>
-        <p:spPr>
-          <a:xfrm>
-            <a:off x="631627" y="2365177"/>
-            <a:ext cx="8086939" cy="174575"/>
-          </a:xfrm>
-          <a:prstGeom prst="rect">
-            <a:avLst/>
-          </a:prstGeom>
-          <a:noFill/>
-          <a:ln/>
-        </p:spPr>
-        <p:txBody>
-          <a:bodyPr wrap="square" lIns="0" tIns="0" rIns="0" bIns="0" rtlCol="0" anchor="t"/>
-          <a:lstStyle/>
-          <a:p>
-            <a:pPr algn="l" indent="0" marL="0">
-              <a:lnSpc>
-                <a:spcPts val="1375"/>
-              </a:lnSpc>
-              <a:buNone/>
-            </a:pPr>
-            <a:r>
-              <a:rPr lang="en-US" sz="1100" dirty="0">
-                <a:solidFill>
-                  <a:srgbClr val="2C2C2C"/>
-                </a:solidFill>
-                <a:latin typeface="Courier New" pitchFamily="34" charset="0"/>
-                <a:ea typeface="Courier New" pitchFamily="34" charset="-122"/>
-                <a:cs typeface="Courier New" pitchFamily="34" charset="-120"/>
-              </a:rPr>
-              <a:t>6×8 = ___      7×8 = ___      8×8 = ___      9×8 = ___</a:t>
-            </a:r>
-            <a:endParaRPr lang="en-US" sz="1100" dirty="0"/>
-          </a:p>
-        </p:txBody>
-      </p:sp>
-      <p:sp>
-        <p:nvSpPr>
-          <p:cNvPr id="11" name="Text 9"/>
-          <p:cNvSpPr/>
-          <p:nvPr/>
-        </p:nvSpPr>
-        <p:spPr>
-          <a:xfrm>
-            <a:off x="631627" y="2539752"/>
-            <a:ext cx="8086939" cy="174575"/>
-          </a:xfrm>
-          <a:prstGeom prst="rect">
-            <a:avLst/>
-          </a:prstGeom>
-          <a:noFill/>
-          <a:ln/>
-        </p:spPr>
-        <p:txBody>
-          <a:bodyPr wrap="square" lIns="0" tIns="0" rIns="0" bIns="0" rtlCol="0" anchor="t"/>
-          <a:lstStyle/>
-          <a:p>
-            <a:pPr algn="l" indent="0" marL="0">
-              <a:lnSpc>
-                <a:spcPts val="1375"/>
-              </a:lnSpc>
-              <a:buNone/>
-            </a:pPr>
-            <a:r>
-              <a:rPr lang="en-US" sz="1100" dirty="0">
-                <a:solidFill>
-                  <a:srgbClr val="2C2C2C"/>
-                </a:solidFill>
-                <a:latin typeface="Courier New" pitchFamily="34" charset="0"/>
-                <a:ea typeface="Courier New" pitchFamily="34" charset="-122"/>
-                <a:cs typeface="Courier New" pitchFamily="34" charset="-120"/>
-              </a:rPr>
-              <a:t>6×9 = ___      7×9 = ___      8×9 = ___      9×9 = ___</a:t>
-            </a:r>
-            <a:endParaRPr lang="en-US" sz="1100" dirty="0"/>
-          </a:p>
-        </p:txBody>
-      </p:sp>
-      <p:sp>
-        <p:nvSpPr>
-          <p:cNvPr id="12" name="Text 10"/>
-          <p:cNvSpPr/>
-          <p:nvPr/>
-        </p:nvSpPr>
-        <p:spPr>
-          <a:xfrm>
-            <a:off x="406301" y="2930128"/>
-            <a:ext cx="8498026" cy="213271"/>
-          </a:xfrm>
-          <a:prstGeom prst="rect">
-            <a:avLst/>
-          </a:prstGeom>
-          <a:noFill/>
-          <a:ln/>
-        </p:spPr>
-        <p:txBody>
-          <a:bodyPr wrap="square" lIns="0" tIns="0" rIns="0" bIns="0" rtlCol="0" anchor="t"/>
-          <a:lstStyle/>
-          <a:p>
-            <a:pPr algn="l" indent="0" marL="0">
-              <a:lnSpc>
-                <a:spcPts val="1680"/>
-              </a:lnSpc>
-              <a:spcBef>
-                <a:spcPts val="300"/>
-              </a:spcBef>
-              <a:spcAft>
-                <a:spcPts val="300"/>
-              </a:spcAft>
-              <a:buNone/>
-            </a:pPr>
-            <a:r>
-              <a:rPr lang="en-US" sz="1200" dirty="0">
-                <a:solidFill>
-                  <a:srgbClr val="2C2C2C"/>
-                </a:solidFill>
-                <a:latin typeface="Verdana" pitchFamily="34" charset="0"/>
-                <a:ea typeface="Verdana" pitchFamily="34" charset="-122"/>
-                <a:cs typeface="Verdana" pitchFamily="34" charset="-120"/>
-              </a:rPr>
-              <a:t>Answer key:</a:t>
-            </a:r>
-            <a:endParaRPr lang="en-US" sz="1200" dirty="0"/>
-          </a:p>
-        </p:txBody>
-      </p:sp>
-      <p:sp>
-        <p:nvSpPr>
-          <p:cNvPr id="13" name="Text 11"/>
-          <p:cNvSpPr/>
-          <p:nvPr/>
-        </p:nvSpPr>
-        <p:spPr>
-          <a:xfrm>
-            <a:off x="406301" y="3232249"/>
-            <a:ext cx="8331398" cy="952202"/>
-          </a:xfrm>
-          <a:prstGeom prst="rect">
-            <a:avLst/>
-          </a:prstGeom>
-          <a:solidFill>
-            <a:srgbClr val="FFFFFF"/>
-          </a:solidFill>
-          <a:ln/>
-        </p:spPr>
-        <p:txBody>
-          <a:bodyPr wrap="square" rtlCol="0" anchor="ctr"/>
-          <a:lstStyle/>
-          <a:p>
-            <a:pPr indent="0" marL="0">
-              <a:buNone/>
-            </a:pPr>
-            <a:endParaRPr lang="en-US" dirty="0"/>
-          </a:p>
-        </p:txBody>
-      </p:sp>
-      <p:sp>
-        <p:nvSpPr>
-          <p:cNvPr id="14" name="Shape 12"/>
-          <p:cNvSpPr/>
-          <p:nvPr/>
-        </p:nvSpPr>
-        <p:spPr>
-          <a:xfrm>
-            <a:off x="430113" y="3232249"/>
-            <a:ext cx="0" cy="952202"/>
-          </a:xfrm>
-          <a:prstGeom prst="line">
-            <a:avLst/>
-          </a:prstGeom>
-          <a:noFill/>
-          <a:ln w="47625">
-            <a:solidFill>
-              <a:srgbClr val="87A96B"/>
-            </a:solidFill>
-            <a:prstDash val="solid"/>
-          </a:ln>
-        </p:spPr>
-      </p:sp>
-      <p:sp>
-        <p:nvSpPr>
-          <p:cNvPr id="15" name="Text 13"/>
-          <p:cNvSpPr/>
-          <p:nvPr/>
-        </p:nvSpPr>
-        <p:spPr>
-          <a:xfrm>
-            <a:off x="631627" y="3359200"/>
-            <a:ext cx="8086939" cy="174575"/>
-          </a:xfrm>
-          <a:prstGeom prst="rect">
-            <a:avLst/>
-          </a:prstGeom>
-          <a:noFill/>
-          <a:ln/>
-        </p:spPr>
-        <p:txBody>
-          <a:bodyPr wrap="square" lIns="0" tIns="0" rIns="0" bIns="0" rtlCol="0" anchor="t"/>
-          <a:lstStyle/>
-          <a:p>
-            <a:pPr algn="l" indent="0" marL="0">
-              <a:lnSpc>
-                <a:spcPts val="1375"/>
-              </a:lnSpc>
-              <a:buNone/>
-            </a:pPr>
-            <a:r>
-              <a:rPr lang="en-US" sz="1100" dirty="0">
-                <a:solidFill>
-                  <a:srgbClr val="2C2C2C"/>
-                </a:solidFill>
-                <a:latin typeface="Courier New" pitchFamily="34" charset="0"/>
-                <a:ea typeface="Courier New" pitchFamily="34" charset="-122"/>
-                <a:cs typeface="Courier New" pitchFamily="34" charset="-120"/>
-              </a:rPr>
-              <a:t>36  42  48  54</a:t>
-            </a:r>
-            <a:endParaRPr lang="en-US" sz="1100" dirty="0"/>
-          </a:p>
-        </p:txBody>
-      </p:sp>
-      <p:sp>
-        <p:nvSpPr>
-          <p:cNvPr id="16" name="Text 14"/>
-          <p:cNvSpPr/>
-          <p:nvPr/>
-        </p:nvSpPr>
-        <p:spPr>
-          <a:xfrm>
-            <a:off x="631627" y="3533775"/>
-            <a:ext cx="8086939" cy="174575"/>
-          </a:xfrm>
-          <a:prstGeom prst="rect">
-            <a:avLst/>
-          </a:prstGeom>
-          <a:noFill/>
-          <a:ln/>
-        </p:spPr>
-        <p:txBody>
-          <a:bodyPr wrap="square" lIns="0" tIns="0" rIns="0" bIns="0" rtlCol="0" anchor="t"/>
-          <a:lstStyle/>
-          <a:p>
-            <a:pPr algn="l" indent="0" marL="0">
-              <a:lnSpc>
-                <a:spcPts val="1375"/>
-              </a:lnSpc>
-              <a:buNone/>
-            </a:pPr>
-            <a:r>
-              <a:rPr lang="en-US" sz="1100" dirty="0">
-                <a:solidFill>
-                  <a:srgbClr val="2C2C2C"/>
-                </a:solidFill>
-                <a:latin typeface="Courier New" pitchFamily="34" charset="0"/>
-                <a:ea typeface="Courier New" pitchFamily="34" charset="-122"/>
-                <a:cs typeface="Courier New" pitchFamily="34" charset="-120"/>
-              </a:rPr>
-              <a:t>42  49  56  63</a:t>
-            </a:r>
-            <a:endParaRPr lang="en-US" sz="1100" dirty="0"/>
-          </a:p>
-        </p:txBody>
-      </p:sp>
-      <p:sp>
-        <p:nvSpPr>
-          <p:cNvPr id="17" name="Text 15"/>
-          <p:cNvSpPr/>
-          <p:nvPr/>
-        </p:nvSpPr>
-        <p:spPr>
-          <a:xfrm>
-            <a:off x="631627" y="3708350"/>
-            <a:ext cx="8086939" cy="174575"/>
-          </a:xfrm>
-          <a:prstGeom prst="rect">
-            <a:avLst/>
-          </a:prstGeom>
-          <a:noFill/>
-          <a:ln/>
-        </p:spPr>
-        <p:txBody>
-          <a:bodyPr wrap="square" lIns="0" tIns="0" rIns="0" bIns="0" rtlCol="0" anchor="t"/>
-          <a:lstStyle/>
-          <a:p>
-            <a:pPr algn="l" indent="0" marL="0">
-              <a:lnSpc>
-                <a:spcPts val="1375"/>
-              </a:lnSpc>
-              <a:buNone/>
-            </a:pPr>
-            <a:r>
-              <a:rPr lang="en-US" sz="1100" dirty="0">
-                <a:solidFill>
-                  <a:srgbClr val="2C2C2C"/>
-                </a:solidFill>
-                <a:latin typeface="Courier New" pitchFamily="34" charset="0"/>
-                <a:ea typeface="Courier New" pitchFamily="34" charset="-122"/>
-                <a:cs typeface="Courier New" pitchFamily="34" charset="-120"/>
-              </a:rPr>
-              <a:t>48  56  64  72</a:t>
-            </a:r>
-            <a:endParaRPr lang="en-US" sz="1100" dirty="0"/>
-          </a:p>
-        </p:txBody>
-      </p:sp>
-      <p:sp>
-        <p:nvSpPr>
-          <p:cNvPr id="18" name="Text 16"/>
-          <p:cNvSpPr/>
-          <p:nvPr/>
-        </p:nvSpPr>
-        <p:spPr>
-          <a:xfrm>
-            <a:off x="631627" y="3882926"/>
-            <a:ext cx="8086939" cy="174575"/>
-          </a:xfrm>
-          <a:prstGeom prst="rect">
-            <a:avLst/>
-          </a:prstGeom>
-          <a:noFill/>
-          <a:ln/>
-        </p:spPr>
-        <p:txBody>
-          <a:bodyPr wrap="square" lIns="0" tIns="0" rIns="0" bIns="0" rtlCol="0" anchor="t"/>
-          <a:lstStyle/>
-          <a:p>
-            <a:pPr algn="l" indent="0" marL="0">
-              <a:lnSpc>
-                <a:spcPts val="1375"/>
-              </a:lnSpc>
-              <a:buNone/>
-            </a:pPr>
-            <a:r>
-              <a:rPr lang="en-US" sz="1100" dirty="0">
-                <a:solidFill>
-                  <a:srgbClr val="2C2C2C"/>
-                </a:solidFill>
-                <a:latin typeface="Courier New" pitchFamily="34" charset="0"/>
-                <a:ea typeface="Courier New" pitchFamily="34" charset="-122"/>
-                <a:cs typeface="Courier New" pitchFamily="34" charset="-120"/>
-              </a:rPr>
-              <a:t>54  63  72  81</a:t>
-            </a:r>
-            <a:endParaRPr lang="en-US" sz="1100" dirty="0"/>
-          </a:p>
-        </p:txBody>
-      </p:sp>
-      <p:sp>
-        <p:nvSpPr>
-          <p:cNvPr id="19" name="Text 17"/>
           <p:cNvSpPr/>
           <p:nvPr/>
         </p:nvSpPr>
@@ -4119,7 +4478,7 @@
                 <a:ea typeface="Georgia" pitchFamily="34" charset="-122"/>
                 <a:cs typeface="Georgia" pitchFamily="34" charset="-120"/>
               </a:rPr>
-              <a:t>Race round 2 (7 min)</a:t>
+              <a:t>Race round 1 (8 min)</a:t>
             </a:r>
             <a:endParaRPr lang="en-US" sz="1800" dirty="0"/>
           </a:p>
@@ -4133,8 +4492,8 @@
         </p:nvSpPr>
         <p:spPr>
           <a:xfrm>
-            <a:off x="406301" y="870942"/>
-            <a:ext cx="8498026" cy="213271"/>
+            <a:off x="634901" y="883593"/>
+            <a:ext cx="8102798" cy="1013222"/>
           </a:xfrm>
           <a:prstGeom prst="rect">
             <a:avLst/>
@@ -4146,17 +4505,15 @@
           <a:bodyPr wrap="square" lIns="0" tIns="0" rIns="0" bIns="0" rtlCol="0" anchor="t"/>
           <a:lstStyle/>
           <a:p>
-            <a:pPr algn="l" indent="0" marL="0">
-              <a:lnSpc>
-                <a:spcPts val="1680"/>
-              </a:lnSpc>
-              <a:spcBef>
-                <a:spcPts val="300"/>
-              </a:spcBef>
-              <a:spcAft>
-                <a:spcPts val="300"/>
-              </a:spcAft>
-              <a:buNone/>
+            <a:pPr algn="l" marL="342900" indent="-342900">
+              <a:lnSpc>
+                <a:spcPts val="1620"/>
+              </a:lnSpc>
+              <a:spcAft>
+                <a:spcPts val="300"/>
+              </a:spcAft>
+              <a:buSzPct val="100000"/>
+              <a:buChar char="•"/>
             </a:pPr>
             <a:r>
               <a:rPr lang="en-US" sz="1200" dirty="0">
@@ -4167,15 +4524,135 @@
                 <a:ea typeface="Verdana" pitchFamily="34" charset="-122"/>
                 <a:cs typeface="Verdana" pitchFamily="34" charset="-120"/>
               </a:rPr>
-              <a:t>– Same sheet, fresh strip. Solve as many as possible in 2 minutes. – Beat your round-1 count.</a:t>
+              <a:t>Pass out the Race Sheet (face-down).</a:t>
             </a:r>
             <a:endParaRPr lang="en-US" sz="1200" dirty="0"/>
           </a:p>
+          <a:p>
+            <a:pPr algn="l" marL="342900" indent="-342900">
+              <a:lnSpc>
+                <a:spcPts val="1620"/>
+              </a:lnSpc>
+              <a:spcAft>
+                <a:spcPts val="300"/>
+              </a:spcAft>
+              <a:buSzPct val="100000"/>
+              <a:buChar char="•"/>
+            </a:pPr>
+            <a:r>
+              <a:rPr lang="en-US" sz="1200" dirty="0">
+                <a:solidFill>
+                  <a:srgbClr val="2C2C2C"/>
+                </a:solidFill>
+                <a:latin typeface="Verdana" pitchFamily="34" charset="0"/>
+                <a:ea typeface="Verdana" pitchFamily="34" charset="-122"/>
+                <a:cs typeface="Verdana" pitchFamily="34" charset="-120"/>
+              </a:rPr>
+              <a:t>On "Go," flip and solve all 16 problems using the finger trick. As fast as possible.</a:t>
+            </a:r>
+            <a:endParaRPr lang="en-US" sz="1200" dirty="0"/>
+          </a:p>
+          <a:p>
+            <a:pPr algn="l" marL="342900" indent="-342900">
+              <a:lnSpc>
+                <a:spcPts val="1620"/>
+              </a:lnSpc>
+              <a:spcAft>
+                <a:spcPts val="300"/>
+              </a:spcAft>
+              <a:buSzPct val="100000"/>
+              <a:buChar char="•"/>
+            </a:pPr>
+            <a:r>
+              <a:rPr lang="en-US" sz="1200" dirty="0">
+                <a:solidFill>
+                  <a:srgbClr val="2C2C2C"/>
+                </a:solidFill>
+                <a:latin typeface="Verdana" pitchFamily="34" charset="0"/>
+                <a:ea typeface="Verdana" pitchFamily="34" charset="-122"/>
+                <a:cs typeface="Verdana" pitchFamily="34" charset="-120"/>
+              </a:rPr>
+              <a:t>After 3 minutes, "Stop." Note how far each child got and how many were correct.</a:t>
+            </a:r>
+            <a:endParaRPr lang="en-US" sz="1200" dirty="0"/>
+          </a:p>
+          <a:p>
+            <a:pPr algn="l" marL="342900" indent="-342900">
+              <a:lnSpc>
+                <a:spcPts val="1620"/>
+              </a:lnSpc>
+              <a:spcAft>
+                <a:spcPts val="300"/>
+              </a:spcAft>
+              <a:buSzPct val="100000"/>
+              <a:buChar char="•"/>
+            </a:pPr>
+            <a:r>
+              <a:rPr lang="en-US" sz="1200" dirty="0">
+                <a:solidFill>
+                  <a:srgbClr val="2C2C2C"/>
+                </a:solidFill>
+                <a:latin typeface="Verdana" pitchFamily="34" charset="0"/>
+                <a:ea typeface="Verdana" pitchFamily="34" charset="-122"/>
+                <a:cs typeface="Verdana" pitchFamily="34" charset="-120"/>
+              </a:rPr>
+              <a:t>Self-correct against the answer key.</a:t>
+            </a:r>
+            <a:endParaRPr lang="en-US" sz="1200" dirty="0"/>
+          </a:p>
         </p:txBody>
       </p:sp>
       <p:sp>
         <p:nvSpPr>
           <p:cNvPr id="5" name="Text 3"/>
+          <p:cNvSpPr/>
+          <p:nvPr/>
+        </p:nvSpPr>
+        <p:spPr>
+          <a:xfrm>
+            <a:off x="406301" y="1985665"/>
+            <a:ext cx="8498026" cy="213271"/>
+          </a:xfrm>
+          <a:prstGeom prst="rect">
+            <a:avLst/>
+          </a:prstGeom>
+          <a:noFill/>
+          <a:ln/>
+        </p:spPr>
+        <p:txBody>
+          <a:bodyPr wrap="square" lIns="0" tIns="0" rIns="0" bIns="0" rtlCol="0" anchor="t"/>
+          <a:lstStyle/>
+          <a:p>
+            <a:pPr algn="l" indent="0" marL="0">
+              <a:lnSpc>
+                <a:spcPts val="1680"/>
+              </a:lnSpc>
+              <a:spcBef>
+                <a:spcPts val="300"/>
+              </a:spcBef>
+              <a:spcAft>
+                <a:spcPts val="300"/>
+              </a:spcAft>
+              <a:buNone/>
+            </a:pPr>
+            <a:r>
+              <a:rPr lang="en-US" sz="1200" dirty="0">
+                <a:solidFill>
+                  <a:srgbClr val="2C2C2C"/>
+                </a:solidFill>
+                <a:latin typeface="Verdana" pitchFamily="34" charset="0"/>
+                <a:ea typeface="Verdana" pitchFamily="34" charset="-122"/>
+                <a:cs typeface="Verdana" pitchFamily="34" charset="-120"/>
+              </a:rPr>
+              <a:t>Race Sheet:</a:t>
+            </a:r>
+            <a:endParaRPr lang="en-US" sz="1200" dirty="0"/>
+          </a:p>
+        </p:txBody>
+      </p:sp>
+      <p:sp>
+        <p:nvSpPr>
+          <p:cNvPr id="6" name="Text 4"/>
           <p:cNvSpPr/>
           <p:nvPr/>
         </p:nvSpPr>
@@ -4325,7 +4802,7 @@
                 <a:ea typeface="Georgia" pitchFamily="34" charset="-122"/>
                 <a:cs typeface="Georgia" pitchFamily="34" charset="-120"/>
               </a:rPr>
-              <a:t>Pair quick-fire (8 min)</a:t>
+              <a:t>Race round 1 (8 min) (cont.)</a:t>
             </a:r>
             <a:endParaRPr lang="en-US" sz="1800" dirty="0"/>
           </a:p>
@@ -4339,8 +4816,229 @@
         </p:nvSpPr>
         <p:spPr>
           <a:xfrm>
-            <a:off x="406301" y="870942"/>
-            <a:ext cx="8498026" cy="426541"/>
+            <a:off x="406301" y="883593"/>
+            <a:ext cx="8331398" cy="952202"/>
+          </a:xfrm>
+          <a:prstGeom prst="rect">
+            <a:avLst/>
+          </a:prstGeom>
+          <a:solidFill>
+            <a:srgbClr val="FFFFFF"/>
+          </a:solidFill>
+          <a:ln/>
+        </p:spPr>
+        <p:txBody>
+          <a:bodyPr wrap="square" rtlCol="0" anchor="ctr"/>
+          <a:lstStyle/>
+          <a:p>
+            <a:pPr indent="0" marL="0">
+              <a:buNone/>
+            </a:pPr>
+            <a:endParaRPr lang="en-US" dirty="0"/>
+          </a:p>
+        </p:txBody>
+      </p:sp>
+      <p:sp>
+        <p:nvSpPr>
+          <p:cNvPr id="5" name="Shape 3"/>
+          <p:cNvSpPr/>
+          <p:nvPr/>
+        </p:nvSpPr>
+        <p:spPr>
+          <a:xfrm>
+            <a:off x="430113" y="883593"/>
+            <a:ext cx="0" cy="952202"/>
+          </a:xfrm>
+          <a:prstGeom prst="line">
+            <a:avLst/>
+          </a:prstGeom>
+          <a:noFill/>
+          <a:ln w="47625">
+            <a:solidFill>
+              <a:srgbClr val="87A96B"/>
+            </a:solidFill>
+            <a:prstDash val="solid"/>
+          </a:ln>
+        </p:spPr>
+      </p:sp>
+      <p:sp>
+        <p:nvSpPr>
+          <p:cNvPr id="6" name="Text 4"/>
+          <p:cNvSpPr/>
+          <p:nvPr/>
+        </p:nvSpPr>
+        <p:spPr>
+          <a:xfrm>
+            <a:off x="631627" y="1010543"/>
+            <a:ext cx="8086939" cy="174575"/>
+          </a:xfrm>
+          <a:prstGeom prst="rect">
+            <a:avLst/>
+          </a:prstGeom>
+          <a:noFill/>
+          <a:ln/>
+        </p:spPr>
+        <p:txBody>
+          <a:bodyPr wrap="square" lIns="0" tIns="0" rIns="0" bIns="0" rtlCol="0" anchor="t"/>
+          <a:lstStyle/>
+          <a:p>
+            <a:pPr algn="l" indent="0" marL="0">
+              <a:lnSpc>
+                <a:spcPts val="1375"/>
+              </a:lnSpc>
+              <a:buNone/>
+            </a:pPr>
+            <a:r>
+              <a:rPr lang="en-US" sz="1100" dirty="0">
+                <a:solidFill>
+                  <a:srgbClr val="2C2C2C"/>
+                </a:solidFill>
+                <a:latin typeface="Courier New" pitchFamily="34" charset="0"/>
+                <a:ea typeface="Courier New" pitchFamily="34" charset="-122"/>
+                <a:cs typeface="Courier New" pitchFamily="34" charset="-120"/>
+              </a:rPr>
+              <a:t>6×6 = ___      7×6 = ___      8×6 = ___      9×6 = ___</a:t>
+            </a:r>
+            <a:endParaRPr lang="en-US" sz="1100" dirty="0"/>
+          </a:p>
+        </p:txBody>
+      </p:sp>
+      <p:sp>
+        <p:nvSpPr>
+          <p:cNvPr id="7" name="Text 5"/>
+          <p:cNvSpPr/>
+          <p:nvPr/>
+        </p:nvSpPr>
+        <p:spPr>
+          <a:xfrm>
+            <a:off x="631627" y="1185118"/>
+            <a:ext cx="8086939" cy="174575"/>
+          </a:xfrm>
+          <a:prstGeom prst="rect">
+            <a:avLst/>
+          </a:prstGeom>
+          <a:noFill/>
+          <a:ln/>
+        </p:spPr>
+        <p:txBody>
+          <a:bodyPr wrap="square" lIns="0" tIns="0" rIns="0" bIns="0" rtlCol="0" anchor="t"/>
+          <a:lstStyle/>
+          <a:p>
+            <a:pPr algn="l" indent="0" marL="0">
+              <a:lnSpc>
+                <a:spcPts val="1375"/>
+              </a:lnSpc>
+              <a:buNone/>
+            </a:pPr>
+            <a:r>
+              <a:rPr lang="en-US" sz="1100" dirty="0">
+                <a:solidFill>
+                  <a:srgbClr val="2C2C2C"/>
+                </a:solidFill>
+                <a:latin typeface="Courier New" pitchFamily="34" charset="0"/>
+                <a:ea typeface="Courier New" pitchFamily="34" charset="-122"/>
+                <a:cs typeface="Courier New" pitchFamily="34" charset="-120"/>
+              </a:rPr>
+              <a:t>6×7 = ___      7×7 = ___      8×7 = ___      9×7 = ___</a:t>
+            </a:r>
+            <a:endParaRPr lang="en-US" sz="1100" dirty="0"/>
+          </a:p>
+        </p:txBody>
+      </p:sp>
+      <p:sp>
+        <p:nvSpPr>
+          <p:cNvPr id="8" name="Text 6"/>
+          <p:cNvSpPr/>
+          <p:nvPr/>
+        </p:nvSpPr>
+        <p:spPr>
+          <a:xfrm>
+            <a:off x="631627" y="1359694"/>
+            <a:ext cx="8086939" cy="174575"/>
+          </a:xfrm>
+          <a:prstGeom prst="rect">
+            <a:avLst/>
+          </a:prstGeom>
+          <a:noFill/>
+          <a:ln/>
+        </p:spPr>
+        <p:txBody>
+          <a:bodyPr wrap="square" lIns="0" tIns="0" rIns="0" bIns="0" rtlCol="0" anchor="t"/>
+          <a:lstStyle/>
+          <a:p>
+            <a:pPr algn="l" indent="0" marL="0">
+              <a:lnSpc>
+                <a:spcPts val="1375"/>
+              </a:lnSpc>
+              <a:buNone/>
+            </a:pPr>
+            <a:r>
+              <a:rPr lang="en-US" sz="1100" dirty="0">
+                <a:solidFill>
+                  <a:srgbClr val="2C2C2C"/>
+                </a:solidFill>
+                <a:latin typeface="Courier New" pitchFamily="34" charset="0"/>
+                <a:ea typeface="Courier New" pitchFamily="34" charset="-122"/>
+                <a:cs typeface="Courier New" pitchFamily="34" charset="-120"/>
+              </a:rPr>
+              <a:t>6×8 = ___      7×8 = ___      8×8 = ___      9×8 = ___</a:t>
+            </a:r>
+            <a:endParaRPr lang="en-US" sz="1100" dirty="0"/>
+          </a:p>
+        </p:txBody>
+      </p:sp>
+      <p:sp>
+        <p:nvSpPr>
+          <p:cNvPr id="9" name="Text 7"/>
+          <p:cNvSpPr/>
+          <p:nvPr/>
+        </p:nvSpPr>
+        <p:spPr>
+          <a:xfrm>
+            <a:off x="631627" y="1534269"/>
+            <a:ext cx="8086939" cy="174575"/>
+          </a:xfrm>
+          <a:prstGeom prst="rect">
+            <a:avLst/>
+          </a:prstGeom>
+          <a:noFill/>
+          <a:ln/>
+        </p:spPr>
+        <p:txBody>
+          <a:bodyPr wrap="square" lIns="0" tIns="0" rIns="0" bIns="0" rtlCol="0" anchor="t"/>
+          <a:lstStyle/>
+          <a:p>
+            <a:pPr algn="l" indent="0" marL="0">
+              <a:lnSpc>
+                <a:spcPts val="1375"/>
+              </a:lnSpc>
+              <a:buNone/>
+            </a:pPr>
+            <a:r>
+              <a:rPr lang="en-US" sz="1100" dirty="0">
+                <a:solidFill>
+                  <a:srgbClr val="2C2C2C"/>
+                </a:solidFill>
+                <a:latin typeface="Courier New" pitchFamily="34" charset="0"/>
+                <a:ea typeface="Courier New" pitchFamily="34" charset="-122"/>
+                <a:cs typeface="Courier New" pitchFamily="34" charset="-120"/>
+              </a:rPr>
+              <a:t>6×9 = ___      7×9 = ___      8×9 = ___      9×9 = ___</a:t>
+            </a:r>
+            <a:endParaRPr lang="en-US" sz="1100" dirty="0"/>
+          </a:p>
+        </p:txBody>
+      </p:sp>
+      <p:sp>
+        <p:nvSpPr>
+          <p:cNvPr id="10" name="Text 8"/>
+          <p:cNvSpPr/>
+          <p:nvPr/>
+        </p:nvSpPr>
+        <p:spPr>
+          <a:xfrm>
+            <a:off x="406301" y="1924645"/>
+            <a:ext cx="8498026" cy="213271"/>
           </a:xfrm>
           <a:prstGeom prst="rect">
             <a:avLst/>
@@ -4373,7 +5071,7 @@
                 <a:ea typeface="Verdana" pitchFamily="34" charset="-122"/>
                 <a:cs typeface="Verdana" pitchFamily="34" charset="-120"/>
               </a:rPr>
-              <a:t>– Pair up. – Partner A reads a problem from the sheet. Partner B answers within 5 seconds (using fingers). – Swap. Cover 10 problems each.</a:t>
+              <a:t>Answer key:</a:t>
             </a:r>
             <a:endParaRPr lang="en-US" sz="1200" dirty="0"/>
           </a:p>
@@ -4381,7 +5079,7 @@
       </p:sp>
       <p:sp>
         <p:nvSpPr>
-          <p:cNvPr id="5" name="Text 3"/>
+          <p:cNvPr id="11" name="Text 9"/>
           <p:cNvSpPr/>
           <p:nvPr/>
         </p:nvSpPr>
@@ -4531,7 +5229,7 @@
                 <a:ea typeface="Georgia" pitchFamily="34" charset="-122"/>
                 <a:cs typeface="Georgia" pitchFamily="34" charset="-120"/>
               </a:rPr>
-              <a:t>Wrap-up (4 min)</a:t>
+              <a:t>Race round 1 (8 min) (cont.)</a:t>
             </a:r>
             <a:endParaRPr lang="en-US" sz="1800" dirty="0"/>
           </a:p>
@@ -4545,13 +5243,66 @@
         </p:nvSpPr>
         <p:spPr>
           <a:xfrm>
-            <a:off x="406301" y="870942"/>
-            <a:ext cx="8498026" cy="213271"/>
-          </a:xfrm>
-          <a:prstGeom prst="rect">
+            <a:off x="406301" y="883593"/>
+            <a:ext cx="8331398" cy="952202"/>
+          </a:xfrm>
+          <a:prstGeom prst="rect">
+            <a:avLst/>
+          </a:prstGeom>
+          <a:solidFill>
+            <a:srgbClr val="FFFFFF"/>
+          </a:solidFill>
+          <a:ln/>
+        </p:spPr>
+        <p:txBody>
+          <a:bodyPr wrap="square" rtlCol="0" anchor="ctr"/>
+          <a:lstStyle/>
+          <a:p>
+            <a:pPr indent="0" marL="0">
+              <a:buNone/>
+            </a:pPr>
+            <a:endParaRPr lang="en-US" dirty="0"/>
+          </a:p>
+        </p:txBody>
+      </p:sp>
+      <p:sp>
+        <p:nvSpPr>
+          <p:cNvPr id="5" name="Shape 3"/>
+          <p:cNvSpPr/>
+          <p:nvPr/>
+        </p:nvSpPr>
+        <p:spPr>
+          <a:xfrm>
+            <a:off x="430113" y="883593"/>
+            <a:ext cx="0" cy="952202"/>
+          </a:xfrm>
+          <a:prstGeom prst="line">
             <a:avLst/>
           </a:prstGeom>
           <a:noFill/>
+          <a:ln w="47625">
+            <a:solidFill>
+              <a:srgbClr val="87A96B"/>
+            </a:solidFill>
+            <a:prstDash val="solid"/>
+          </a:ln>
+        </p:spPr>
+      </p:sp>
+      <p:sp>
+        <p:nvSpPr>
+          <p:cNvPr id="6" name="Text 4"/>
+          <p:cNvSpPr/>
+          <p:nvPr/>
+        </p:nvSpPr>
+        <p:spPr>
+          <a:xfrm>
+            <a:off x="631627" y="1010543"/>
+            <a:ext cx="8086939" cy="174575"/>
+          </a:xfrm>
+          <a:prstGeom prst="rect">
+            <a:avLst/>
+          </a:prstGeom>
+          <a:noFill/>
           <a:ln/>
         </p:spPr>
         <p:txBody>
@@ -4560,34 +5311,154 @@
           <a:p>
             <a:pPr algn="l" indent="0" marL="0">
               <a:lnSpc>
-                <a:spcPts val="1680"/>
-              </a:lnSpc>
-              <a:spcBef>
-                <a:spcPts val="300"/>
-              </a:spcBef>
-              <a:spcAft>
-                <a:spcPts val="300"/>
-              </a:spcAft>
-              <a:buNone/>
-            </a:pPr>
-            <a:r>
-              <a:rPr lang="en-US" sz="1200" dirty="0">
+                <a:spcPts val="1375"/>
+              </a:lnSpc>
+              <a:buNone/>
+            </a:pPr>
+            <a:r>
+              <a:rPr lang="en-US" sz="1100" dirty="0">
                 <a:solidFill>
                   <a:srgbClr val="2C2C2C"/>
                 </a:solidFill>
-                <a:latin typeface="Verdana" pitchFamily="34" charset="0"/>
-                <a:ea typeface="Verdana" pitchFamily="34" charset="-122"/>
-                <a:cs typeface="Verdana" pitchFamily="34" charset="-120"/>
-              </a:rPr>
-              <a:t>– Hands up: who got all 16 right? Who beat their round-1 score? – Cheering. Final chant.</a:t>
-            </a:r>
-            <a:endParaRPr lang="en-US" sz="1200" dirty="0"/>
-          </a:p>
-        </p:txBody>
-      </p:sp>
-      <p:sp>
-        <p:nvSpPr>
-          <p:cNvPr id="5" name="Text 3"/>
+                <a:latin typeface="Courier New" pitchFamily="34" charset="0"/>
+                <a:ea typeface="Courier New" pitchFamily="34" charset="-122"/>
+                <a:cs typeface="Courier New" pitchFamily="34" charset="-120"/>
+              </a:rPr>
+              <a:t>36  42  48  54</a:t>
+            </a:r>
+            <a:endParaRPr lang="en-US" sz="1100" dirty="0"/>
+          </a:p>
+        </p:txBody>
+      </p:sp>
+      <p:sp>
+        <p:nvSpPr>
+          <p:cNvPr id="7" name="Text 5"/>
+          <p:cNvSpPr/>
+          <p:nvPr/>
+        </p:nvSpPr>
+        <p:spPr>
+          <a:xfrm>
+            <a:off x="631627" y="1185118"/>
+            <a:ext cx="8086939" cy="174575"/>
+          </a:xfrm>
+          <a:prstGeom prst="rect">
+            <a:avLst/>
+          </a:prstGeom>
+          <a:noFill/>
+          <a:ln/>
+        </p:spPr>
+        <p:txBody>
+          <a:bodyPr wrap="square" lIns="0" tIns="0" rIns="0" bIns="0" rtlCol="0" anchor="t"/>
+          <a:lstStyle/>
+          <a:p>
+            <a:pPr algn="l" indent="0" marL="0">
+              <a:lnSpc>
+                <a:spcPts val="1375"/>
+              </a:lnSpc>
+              <a:buNone/>
+            </a:pPr>
+            <a:r>
+              <a:rPr lang="en-US" sz="1100" dirty="0">
+                <a:solidFill>
+                  <a:srgbClr val="2C2C2C"/>
+                </a:solidFill>
+                <a:latin typeface="Courier New" pitchFamily="34" charset="0"/>
+                <a:ea typeface="Courier New" pitchFamily="34" charset="-122"/>
+                <a:cs typeface="Courier New" pitchFamily="34" charset="-120"/>
+              </a:rPr>
+              <a:t>42  49  56  63</a:t>
+            </a:r>
+            <a:endParaRPr lang="en-US" sz="1100" dirty="0"/>
+          </a:p>
+        </p:txBody>
+      </p:sp>
+      <p:sp>
+        <p:nvSpPr>
+          <p:cNvPr id="8" name="Text 6"/>
+          <p:cNvSpPr/>
+          <p:nvPr/>
+        </p:nvSpPr>
+        <p:spPr>
+          <a:xfrm>
+            <a:off x="631627" y="1359694"/>
+            <a:ext cx="8086939" cy="174575"/>
+          </a:xfrm>
+          <a:prstGeom prst="rect">
+            <a:avLst/>
+          </a:prstGeom>
+          <a:noFill/>
+          <a:ln/>
+        </p:spPr>
+        <p:txBody>
+          <a:bodyPr wrap="square" lIns="0" tIns="0" rIns="0" bIns="0" rtlCol="0" anchor="t"/>
+          <a:lstStyle/>
+          <a:p>
+            <a:pPr algn="l" indent="0" marL="0">
+              <a:lnSpc>
+                <a:spcPts val="1375"/>
+              </a:lnSpc>
+              <a:buNone/>
+            </a:pPr>
+            <a:r>
+              <a:rPr lang="en-US" sz="1100" dirty="0">
+                <a:solidFill>
+                  <a:srgbClr val="2C2C2C"/>
+                </a:solidFill>
+                <a:latin typeface="Courier New" pitchFamily="34" charset="0"/>
+                <a:ea typeface="Courier New" pitchFamily="34" charset="-122"/>
+                <a:cs typeface="Courier New" pitchFamily="34" charset="-120"/>
+              </a:rPr>
+              <a:t>48  56  64  72</a:t>
+            </a:r>
+            <a:endParaRPr lang="en-US" sz="1100" dirty="0"/>
+          </a:p>
+        </p:txBody>
+      </p:sp>
+      <p:sp>
+        <p:nvSpPr>
+          <p:cNvPr id="9" name="Text 7"/>
+          <p:cNvSpPr/>
+          <p:nvPr/>
+        </p:nvSpPr>
+        <p:spPr>
+          <a:xfrm>
+            <a:off x="631627" y="1534269"/>
+            <a:ext cx="8086939" cy="174575"/>
+          </a:xfrm>
+          <a:prstGeom prst="rect">
+            <a:avLst/>
+          </a:prstGeom>
+          <a:noFill/>
+          <a:ln/>
+        </p:spPr>
+        <p:txBody>
+          <a:bodyPr wrap="square" lIns="0" tIns="0" rIns="0" bIns="0" rtlCol="0" anchor="t"/>
+          <a:lstStyle/>
+          <a:p>
+            <a:pPr algn="l" indent="0" marL="0">
+              <a:lnSpc>
+                <a:spcPts val="1375"/>
+              </a:lnSpc>
+              <a:buNone/>
+            </a:pPr>
+            <a:r>
+              <a:rPr lang="en-US" sz="1100" dirty="0">
+                <a:solidFill>
+                  <a:srgbClr val="2C2C2C"/>
+                </a:solidFill>
+                <a:latin typeface="Courier New" pitchFamily="34" charset="0"/>
+                <a:ea typeface="Courier New" pitchFamily="34" charset="-122"/>
+                <a:cs typeface="Courier New" pitchFamily="34" charset="-120"/>
+              </a:rPr>
+              <a:t>54  63  72  81</a:t>
+            </a:r>
+            <a:endParaRPr lang="en-US" sz="1100" dirty="0"/>
+          </a:p>
+        </p:txBody>
+      </p:sp>
+      <p:sp>
+        <p:nvSpPr>
+          <p:cNvPr id="10" name="Text 8"/>
           <p:cNvSpPr/>
           <p:nvPr/>
         </p:nvSpPr>
@@ -4737,7 +5608,7 @@
                 <a:ea typeface="Georgia" pitchFamily="34" charset="-122"/>
                 <a:cs typeface="Georgia" pitchFamily="34" charset="-120"/>
               </a:rPr>
-              <a:t>Homework</a:t>
+              <a:t>Race round 2 (7 min)</a:t>
             </a:r>
             <a:endParaRPr lang="en-US" sz="1800" dirty="0"/>
           </a:p>
@@ -4751,8 +5622,8 @@
         </p:nvSpPr>
         <p:spPr>
           <a:xfrm>
-            <a:off x="406301" y="870942"/>
-            <a:ext cx="8498026" cy="213271"/>
+            <a:off x="634901" y="883593"/>
+            <a:ext cx="8102798" cy="525661"/>
           </a:xfrm>
           <a:prstGeom prst="rect">
             <a:avLst/>
@@ -4764,17 +5635,15 @@
           <a:bodyPr wrap="square" lIns="0" tIns="0" rIns="0" bIns="0" rtlCol="0" anchor="t"/>
           <a:lstStyle/>
           <a:p>
-            <a:pPr algn="l" indent="0" marL="0">
-              <a:lnSpc>
-                <a:spcPts val="1680"/>
-              </a:lnSpc>
-              <a:spcBef>
-                <a:spcPts val="300"/>
-              </a:spcBef>
-              <a:spcAft>
-                <a:spcPts val="300"/>
-              </a:spcAft>
-              <a:buNone/>
+            <a:pPr algn="l" marL="342900" indent="-342900">
+              <a:lnSpc>
+                <a:spcPts val="1620"/>
+              </a:lnSpc>
+              <a:spcAft>
+                <a:spcPts val="300"/>
+              </a:spcAft>
+              <a:buSzPct val="100000"/>
+              <a:buChar char="•"/>
             </a:pPr>
             <a:r>
               <a:rPr lang="en-US" sz="1200" dirty="0">
@@ -4785,7 +5654,31 @@
                 <a:ea typeface="Verdana" pitchFamily="34" charset="-122"/>
                 <a:cs typeface="Verdana" pitchFamily="34" charset="-120"/>
               </a:rPr>
-              <a:t>– Practice 6 × 6 through 9 × 9 at home. 5 minutes a day. Time yourself.</a:t>
+              <a:t>Same sheet, fresh strip. Solve as many as possible in 2 minutes.</a:t>
+            </a:r>
+            <a:endParaRPr lang="en-US" sz="1200" dirty="0"/>
+          </a:p>
+          <a:p>
+            <a:pPr algn="l" marL="342900" indent="-342900">
+              <a:lnSpc>
+                <a:spcPts val="1620"/>
+              </a:lnSpc>
+              <a:spcAft>
+                <a:spcPts val="300"/>
+              </a:spcAft>
+              <a:buSzPct val="100000"/>
+              <a:buChar char="•"/>
+            </a:pPr>
+            <a:r>
+              <a:rPr lang="en-US" sz="1200" dirty="0">
+                <a:solidFill>
+                  <a:srgbClr val="2C2C2C"/>
+                </a:solidFill>
+                <a:latin typeface="Verdana" pitchFamily="34" charset="0"/>
+                <a:ea typeface="Verdana" pitchFamily="34" charset="-122"/>
+                <a:cs typeface="Verdana" pitchFamily="34" charset="-120"/>
+              </a:rPr>
+              <a:t>Beat your round-1 count.</a:t>
             </a:r>
             <a:endParaRPr lang="en-US" sz="1200" dirty="0"/>
           </a:p>
